--- a/one-pager/guide/How-to-Make-a-Quote.pptx
+++ b/one-pager/guide/How-to-Make-a-Quote.pptx
@@ -11,14 +11,6 @@
     <p:sldId id="259" r:id="rId10"/>
     <p:sldId id="260" r:id="rId11"/>
     <p:sldId id="261" r:id="rId12"/>
-    <p:sldId id="262" r:id="rId13"/>
-    <p:sldId id="263" r:id="rId14"/>
-    <p:sldId id="264" r:id="rId15"/>
-    <p:sldId id="265" r:id="rId16"/>
-    <p:sldId id="266" r:id="rId17"/>
-    <p:sldId id="267" r:id="rId18"/>
-    <p:sldId id="268" r:id="rId19"/>
-    <p:sldId id="269" r:id="rId20"/>
   </p:sldIdLst>
   <p:sldSz cx="12191695" cy="6858000" type="screen4x3"/>
   <p:notesSz cx="6858000" cy="9144000"/>
@@ -3117,8 +3109,8 @@
         </p:nvSpPr>
         <p:spPr>
           <a:xfrm>
-            <a:off x="822960" y="2103120"/>
-            <a:ext cx="10058400" cy="1097280"/>
+            <a:off x="822960" y="822960"/>
+            <a:ext cx="10515600" cy="914400"/>
           </a:xfrm>
           <a:prstGeom prst="rect">
             <a:avLst/>
@@ -3135,7 +3127,7 @@
               </a:lnSpc>
             </a:pPr>
             <a:r>
-              <a:rPr sz="5400" b="1">
+              <a:rPr sz="4800" b="1">
                 <a:solidFill>
                   <a:srgbClr val="171717"/>
                 </a:solidFill>
@@ -3154,8 +3146,8 @@
         </p:nvSpPr>
         <p:spPr>
           <a:xfrm>
-            <a:off x="822960" y="3246120"/>
-            <a:ext cx="10058400" cy="548640"/>
+            <a:off x="822960" y="1783080"/>
+            <a:ext cx="10515600" cy="548640"/>
           </a:xfrm>
           <a:prstGeom prst="rect">
             <a:avLst/>
@@ -3172,1462 +3164,31 @@
               </a:lnSpc>
             </a:pPr>
             <a:r>
-              <a:rPr sz="2200" b="0">
+              <a:rPr sz="1800" b="0">
                 <a:solidFill>
                   <a:srgbClr val="6B6B6B"/>
                 </a:solidFill>
                 <a:latin typeface="Inter"/>
               </a:rPr>
-              <a:t>Helix package quotes  ·  pick a package, fill in the blue cells, click Make PDF</a:t>
-            </a:r>
-          </a:p>
-        </p:txBody>
-      </p:sp>
-      <p:sp>
-        <p:nvSpPr>
-          <p:cNvPr id="4" name="TextBox 3"/>
-          <p:cNvSpPr txBox="1"/>
-          <p:nvPr/>
-        </p:nvSpPr>
-        <p:spPr>
-          <a:xfrm>
-            <a:off x="822960" y="6035040"/>
-            <a:ext cx="10058400" cy="365760"/>
-          </a:xfrm>
-          <a:prstGeom prst="rect">
-            <a:avLst/>
-          </a:prstGeom>
-          <a:noFill/>
-        </p:spPr>
-        <p:txBody>
-          <a:bodyPr wrap="square" lIns="0" rIns="0" tIns="0" bIns="0" anchor="t"/>
-          <a:lstStyle/>
-          <a:p>
-            <a:pPr algn="l">
-              <a:lnSpc>
-                <a:spcPct val="110000"/>
-              </a:lnSpc>
-            </a:pPr>
-            <a:r>
-              <a:rPr sz="1300" b="0">
-                <a:solidFill>
-                  <a:srgbClr val="6B6B6B"/>
-                </a:solidFill>
-                <a:latin typeface="Inter"/>
-              </a:rPr>
-              <a:t>368 Event Management  ×  Hellhound Audio</a:t>
-            </a:r>
-          </a:p>
-        </p:txBody>
-      </p:sp>
-    </p:spTree>
-  </p:cSld>
-  <p:clrMapOvr>
-    <a:masterClrMapping/>
-  </p:clrMapOvr>
-</p:sld>
-</file>
-
-<file path=ppt/slides/slide10.xml><?xml version="1.0" encoding="utf-8"?>
-<p:sld xmlns:a="http://schemas.openxmlformats.org/drawingml/2006/main" xmlns:p="http://schemas.openxmlformats.org/presentationml/2006/main" xmlns:r="http://schemas.openxmlformats.org/officeDocument/2006/relationships">
-  <p:cSld>
-    <p:bg>
-      <p:bgPr>
-        <a:solidFill>
-          <a:srgbClr val="FFFFFF"/>
-        </a:solidFill>
-        <a:effectLst/>
-      </p:bgPr>
-    </p:bg>
-    <p:spTree>
-      <p:nvGrpSpPr>
-        <p:cNvPr id="1" name=""/>
-        <p:cNvGrpSpPr/>
-        <p:nvPr/>
-      </p:nvGrpSpPr>
-      <p:grpSpPr/>
-      <p:sp>
-        <p:nvSpPr>
-          <p:cNvPr id="2" name="Rounded Rectangle 1"/>
+              <a:t>Helix package quotes  ·  368 Event Management  ×  Hellhound Audio</a:t>
+            </a:r>
+          </a:p>
+        </p:txBody>
+      </p:sp>
+      <p:sp>
+        <p:nvSpPr>
+          <p:cNvPr id="4" name="Rounded Rectangle 3"/>
           <p:cNvSpPr/>
           <p:nvPr/>
         </p:nvSpPr>
         <p:spPr>
           <a:xfrm>
-            <a:off x="548640" y="777240"/>
-            <a:ext cx="1956816" cy="457200"/>
+            <a:off x="822960" y="2743200"/>
+            <a:ext cx="3246120" cy="2651760"/>
           </a:xfrm>
           <a:prstGeom prst="roundRect">
             <a:avLst>
-              <a:gd name="adj" fmla="val 50000"/>
-            </a:avLst>
-          </a:prstGeom>
-          <a:solidFill>
-            <a:srgbClr val="0096CF"/>
-          </a:solidFill>
-          <a:ln>
-            <a:noFill/>
-          </a:ln>
-          <a:effectLst/>
-        </p:spPr>
-        <p:style>
-          <a:lnRef idx="1">
-            <a:schemeClr val="accent1"/>
-          </a:lnRef>
-          <a:fillRef idx="3">
-            <a:schemeClr val="accent1"/>
-          </a:fillRef>
-          <a:effectRef idx="0">
-            <a:schemeClr val="accent1"/>
-          </a:effectRef>
-          <a:fontRef idx="minor">
-            <a:schemeClr val="lt1"/>
-          </a:fontRef>
-        </p:style>
-        <p:txBody>
-          <a:bodyPr rtlCol="0" anchor="ctr"/>
-          <a:lstStyle/>
-          <a:p>
-            <a:pPr algn="ctr"/>
-          </a:p>
-        </p:txBody>
-      </p:sp>
-      <p:sp>
-        <p:nvSpPr>
-          <p:cNvPr id="3" name="TextBox 2"/>
-          <p:cNvSpPr txBox="1"/>
-          <p:nvPr/>
-        </p:nvSpPr>
-        <p:spPr>
-          <a:xfrm>
-            <a:off x="548640" y="777240"/>
-            <a:ext cx="1956816" cy="457200"/>
-          </a:xfrm>
-          <a:prstGeom prst="rect">
-            <a:avLst/>
-          </a:prstGeom>
-          <a:noFill/>
-        </p:spPr>
-        <p:txBody>
-          <a:bodyPr wrap="square" lIns="0" rIns="0" tIns="0" bIns="0" anchor="ctr"/>
-          <a:lstStyle/>
-          <a:p>
-            <a:pPr algn="ctr">
-              <a:lnSpc>
-                <a:spcPct val="110000"/>
-              </a:lnSpc>
-            </a:pPr>
-            <a:r>
-              <a:rPr sz="1400" b="1">
-                <a:solidFill>
-                  <a:srgbClr val="FFFFFF"/>
-                </a:solidFill>
-                <a:latin typeface="Inter"/>
-              </a:rPr>
-              <a:t>WHERE FILES GO</a:t>
-            </a:r>
-          </a:p>
-        </p:txBody>
-      </p:sp>
-      <p:sp>
-        <p:nvSpPr>
-          <p:cNvPr id="4" name="TextBox 3"/>
-          <p:cNvSpPr txBox="1"/>
-          <p:nvPr/>
-        </p:nvSpPr>
-        <p:spPr>
-          <a:xfrm>
-            <a:off x="548640" y="1463040"/>
-            <a:ext cx="3383280" cy="1463040"/>
-          </a:xfrm>
-          <a:prstGeom prst="rect">
-            <a:avLst/>
-          </a:prstGeom>
-          <a:noFill/>
-        </p:spPr>
-        <p:txBody>
-          <a:bodyPr wrap="square" lIns="0" rIns="0" tIns="0" bIns="0" anchor="t"/>
-          <a:lstStyle/>
-          <a:p>
-            <a:pPr algn="l">
-              <a:lnSpc>
-                <a:spcPct val="105000"/>
-              </a:lnSpc>
-            </a:pPr>
-            <a:r>
-              <a:rPr sz="3000" b="1">
-                <a:solidFill>
-                  <a:srgbClr val="171717"/>
-                </a:solidFill>
-                <a:latin typeface="Inter"/>
-              </a:rPr>
-              <a:t>Where your files go.</a:t>
-            </a:r>
-          </a:p>
-        </p:txBody>
-      </p:sp>
-      <p:sp>
-        <p:nvSpPr>
-          <p:cNvPr id="5" name="TextBox 4"/>
-          <p:cNvSpPr txBox="1"/>
-          <p:nvPr/>
-        </p:nvSpPr>
-        <p:spPr>
-          <a:xfrm>
-            <a:off x="548640" y="3108960"/>
-            <a:ext cx="3291840" cy="3566160"/>
-          </a:xfrm>
-          <a:prstGeom prst="rect">
-            <a:avLst/>
-          </a:prstGeom>
-          <a:noFill/>
-        </p:spPr>
-        <p:txBody>
-          <a:bodyPr wrap="square" lIns="0" rIns="0" tIns="0" bIns="0" anchor="t"/>
-          <a:lstStyle/>
-          <a:p>
-            <a:pPr algn="l">
-              <a:lnSpc>
-                <a:spcPct val="120000"/>
-              </a:lnSpc>
-            </a:pPr>
-            <a:r>
-              <a:rPr sz="2000" b="0">
-                <a:solidFill>
-                  <a:srgbClr val="6B6B6B"/>
-                </a:solidFill>
-                <a:latin typeface="Inter"/>
-              </a:rPr>
-              <a:t>Every PDF is saved in the </a:t>
-            </a:r>
-            <a:r>
-              <a:rPr sz="2000" b="1">
-                <a:solidFill>
-                  <a:srgbClr val="6B6B6B"/>
-                </a:solidFill>
-                <a:latin typeface="Inter"/>
-              </a:rPr>
-              <a:t>Helix Quotes</a:t>
-            </a:r>
-            <a:r>
-              <a:rPr sz="2000" b="0">
-                <a:solidFill>
-                  <a:srgbClr val="6B6B6B"/>
-                </a:solidFill>
-                <a:latin typeface="Inter"/>
-              </a:rPr>
-              <a:t> folder in Google Drive.</a:t>
-            </a:r>
-          </a:p>
-          <a:p>
-            <a:pPr algn="l">
-              <a:lnSpc>
-                <a:spcPct val="120000"/>
-              </a:lnSpc>
-              <a:spcBef>
-                <a:spcPts val="1200"/>
-              </a:spcBef>
-            </a:pPr>
-            <a:r>
-              <a:rPr sz="2000" b="0">
-                <a:solidFill>
-                  <a:srgbClr val="6B6B6B"/>
-                </a:solidFill>
-                <a:latin typeface="Inter"/>
-              </a:rPr>
-              <a:t>The </a:t>
-            </a:r>
-            <a:r>
-              <a:rPr sz="2000" b="1">
-                <a:solidFill>
-                  <a:srgbClr val="6B6B6B"/>
-                </a:solidFill>
-                <a:latin typeface="Inter"/>
-              </a:rPr>
-              <a:t>Log</a:t>
-            </a:r>
-            <a:r>
-              <a:rPr sz="2000" b="0">
-                <a:solidFill>
-                  <a:srgbClr val="6B6B6B"/>
-                </a:solidFill>
-                <a:latin typeface="Inter"/>
-              </a:rPr>
-              <a:t> tab lists every quote, with links.</a:t>
-            </a:r>
-          </a:p>
-        </p:txBody>
-      </p:sp>
-      <p:pic>
-        <p:nvPicPr>
-          <p:cNvPr id="6" name="Picture 5" descr="log-0-180-800-560.png"/>
-          <p:cNvPicPr>
-            <a:picLocks noChangeAspect="1"/>
-          </p:cNvPicPr>
-          <p:nvPr/>
-        </p:nvPicPr>
-        <p:blipFill>
-          <a:blip r:embed="rId2"/>
-          <a:stretch>
-            <a:fillRect/>
-          </a:stretch>
-        </p:blipFill>
-        <p:spPr>
-          <a:xfrm>
-            <a:off x="4160520" y="777240"/>
-            <a:ext cx="7635240" cy="5344668"/>
-          </a:xfrm>
-          <a:prstGeom prst="rect">
-            <a:avLst/>
-          </a:prstGeom>
-        </p:spPr>
-      </p:pic>
-      <p:sp>
-        <p:nvSpPr>
-          <p:cNvPr id="7" name="Rounded Rectangle 6"/>
-          <p:cNvSpPr/>
-          <p:nvPr/>
-        </p:nvSpPr>
-        <p:spPr>
-          <a:xfrm>
-            <a:off x="4160520" y="777240"/>
-            <a:ext cx="7635240" cy="5344668"/>
-          </a:xfrm>
-          <a:prstGeom prst="roundRect">
-            <a:avLst>
-              <a:gd name="adj" fmla="val 1026"/>
-            </a:avLst>
-          </a:prstGeom>
-          <a:noFill/>
-          <a:ln w="9525">
-            <a:solidFill>
-              <a:srgbClr val="DADCE0"/>
-            </a:solidFill>
-          </a:ln>
-          <a:effectLst/>
-        </p:spPr>
-        <p:style>
-          <a:lnRef idx="1">
-            <a:schemeClr val="accent1"/>
-          </a:lnRef>
-          <a:fillRef idx="3">
-            <a:schemeClr val="accent1"/>
-          </a:fillRef>
-          <a:effectRef idx="0">
-            <a:schemeClr val="accent1"/>
-          </a:effectRef>
-          <a:fontRef idx="minor">
-            <a:schemeClr val="lt1"/>
-          </a:fontRef>
-        </p:style>
-        <p:txBody>
-          <a:bodyPr rtlCol="0" anchor="ctr"/>
-          <a:lstStyle/>
-          <a:p>
-            <a:pPr algn="ctr"/>
-          </a:p>
-        </p:txBody>
-      </p:sp>
-      <p:sp>
-        <p:nvSpPr>
-          <p:cNvPr id="8" name="Oval 7"/>
-          <p:cNvSpPr/>
-          <p:nvPr/>
-        </p:nvSpPr>
-        <p:spPr>
-          <a:xfrm>
-            <a:off x="4508877" y="1316478"/>
-            <a:ext cx="2004250" cy="477202"/>
-          </a:xfrm>
-          <a:prstGeom prst="ellipse">
-            <a:avLst/>
-          </a:prstGeom>
-          <a:noFill/>
-          <a:ln w="57150">
-            <a:solidFill>
-              <a:srgbClr val="E8382F"/>
-            </a:solidFill>
-          </a:ln>
-          <a:effectLst/>
-        </p:spPr>
-        <p:style>
-          <a:lnRef idx="1">
-            <a:schemeClr val="accent1"/>
-          </a:lnRef>
-          <a:fillRef idx="3">
-            <a:schemeClr val="accent1"/>
-          </a:fillRef>
-          <a:effectRef idx="0">
-            <a:schemeClr val="accent1"/>
-          </a:effectRef>
-          <a:fontRef idx="minor">
-            <a:schemeClr val="lt1"/>
-          </a:fontRef>
-        </p:style>
-        <p:txBody>
-          <a:bodyPr rtlCol="0" anchor="ctr"/>
-          <a:lstStyle/>
-          <a:p>
-            <a:pPr algn="ctr"/>
-          </a:p>
-        </p:txBody>
-      </p:sp>
-      <p:sp>
-        <p:nvSpPr>
-          <p:cNvPr id="9" name="Rounded Rectangle 8"/>
-          <p:cNvSpPr/>
-          <p:nvPr/>
-        </p:nvSpPr>
-        <p:spPr>
-          <a:xfrm>
-            <a:off x="4276563" y="1866833"/>
-            <a:ext cx="2468880" cy="420624"/>
-          </a:xfrm>
-          <a:prstGeom prst="roundRect">
-            <a:avLst>
-              <a:gd name="adj" fmla="val 50000"/>
-            </a:avLst>
-          </a:prstGeom>
-          <a:solidFill>
-            <a:srgbClr val="E8382F"/>
-          </a:solidFill>
-          <a:ln>
-            <a:noFill/>
-          </a:ln>
-          <a:effectLst/>
-        </p:spPr>
-        <p:style>
-          <a:lnRef idx="1">
-            <a:schemeClr val="accent1"/>
-          </a:lnRef>
-          <a:fillRef idx="3">
-            <a:schemeClr val="accent1"/>
-          </a:fillRef>
-          <a:effectRef idx="0">
-            <a:schemeClr val="accent1"/>
-          </a:effectRef>
-          <a:fontRef idx="minor">
-            <a:schemeClr val="lt1"/>
-          </a:fontRef>
-        </p:style>
-        <p:txBody>
-          <a:bodyPr rtlCol="0" anchor="ctr"/>
-          <a:lstStyle/>
-          <a:p>
-            <a:pPr algn="ctr"/>
-          </a:p>
-        </p:txBody>
-      </p:sp>
-      <p:sp>
-        <p:nvSpPr>
-          <p:cNvPr id="10" name="TextBox 9"/>
-          <p:cNvSpPr txBox="1"/>
-          <p:nvPr/>
-        </p:nvSpPr>
-        <p:spPr>
-          <a:xfrm>
-            <a:off x="4276563" y="1866833"/>
-            <a:ext cx="2468880" cy="420624"/>
-          </a:xfrm>
-          <a:prstGeom prst="rect">
-            <a:avLst/>
-          </a:prstGeom>
-          <a:noFill/>
-        </p:spPr>
-        <p:txBody>
-          <a:bodyPr wrap="square" lIns="0" rIns="0" tIns="0" bIns="0" anchor="ctr"/>
-          <a:lstStyle/>
-          <a:p>
-            <a:pPr algn="ctr">
-              <a:lnSpc>
-                <a:spcPct val="110000"/>
-              </a:lnSpc>
-            </a:pPr>
-            <a:r>
-              <a:rPr sz="1600" b="1">
-                <a:solidFill>
-                  <a:srgbClr val="FFFFFF"/>
-                </a:solidFill>
-                <a:latin typeface="Inter"/>
-              </a:rPr>
-              <a:t>Every quote, saved</a:t>
-            </a:r>
-          </a:p>
-        </p:txBody>
-      </p:sp>
-    </p:spTree>
-  </p:cSld>
-  <p:clrMapOvr>
-    <a:masterClrMapping/>
-  </p:clrMapOvr>
-</p:sld>
-</file>
-
-<file path=ppt/slides/slide11.xml><?xml version="1.0" encoding="utf-8"?>
-<p:sld xmlns:a="http://schemas.openxmlformats.org/drawingml/2006/main" xmlns:p="http://schemas.openxmlformats.org/presentationml/2006/main" xmlns:r="http://schemas.openxmlformats.org/officeDocument/2006/relationships">
-  <p:cSld>
-    <p:bg>
-      <p:bgPr>
-        <a:solidFill>
-          <a:srgbClr val="FFFFFF"/>
-        </a:solidFill>
-        <a:effectLst/>
-      </p:bgPr>
-    </p:bg>
-    <p:spTree>
-      <p:nvGrpSpPr>
-        <p:cNvPr id="1" name=""/>
-        <p:cNvGrpSpPr/>
-        <p:nvPr/>
-      </p:nvGrpSpPr>
-      <p:grpSpPr/>
-      <p:sp>
-        <p:nvSpPr>
-          <p:cNvPr id="2" name="Rounded Rectangle 1"/>
-          <p:cNvSpPr/>
-          <p:nvPr/>
-        </p:nvSpPr>
-        <p:spPr>
-          <a:xfrm>
-            <a:off x="548640" y="777240"/>
-            <a:ext cx="1600200" cy="457200"/>
-          </a:xfrm>
-          <a:prstGeom prst="roundRect">
-            <a:avLst>
-              <a:gd name="adj" fmla="val 50000"/>
-            </a:avLst>
-          </a:prstGeom>
-          <a:solidFill>
-            <a:srgbClr val="0096CF"/>
-          </a:solidFill>
-          <a:ln>
-            <a:noFill/>
-          </a:ln>
-          <a:effectLst/>
-        </p:spPr>
-        <p:style>
-          <a:lnRef idx="1">
-            <a:schemeClr val="accent1"/>
-          </a:lnRef>
-          <a:fillRef idx="3">
-            <a:schemeClr val="accent1"/>
-          </a:fillRef>
-          <a:effectRef idx="0">
-            <a:schemeClr val="accent1"/>
-          </a:effectRef>
-          <a:fontRef idx="minor">
-            <a:schemeClr val="lt1"/>
-          </a:fontRef>
-        </p:style>
-        <p:txBody>
-          <a:bodyPr rtlCol="0" anchor="ctr"/>
-          <a:lstStyle/>
-          <a:p>
-            <a:pPr algn="ctr"/>
-          </a:p>
-        </p:txBody>
-      </p:sp>
-      <p:sp>
-        <p:nvSpPr>
-          <p:cNvPr id="3" name="TextBox 2"/>
-          <p:cNvSpPr txBox="1"/>
-          <p:nvPr/>
-        </p:nvSpPr>
-        <p:spPr>
-          <a:xfrm>
-            <a:off x="548640" y="777240"/>
-            <a:ext cx="1600200" cy="457200"/>
-          </a:xfrm>
-          <a:prstGeom prst="rect">
-            <a:avLst/>
-          </a:prstGeom>
-          <a:noFill/>
-        </p:spPr>
-        <p:txBody>
-          <a:bodyPr wrap="square" lIns="0" rIns="0" tIns="0" bIns="0" anchor="ctr"/>
-          <a:lstStyle/>
-          <a:p>
-            <a:pPr algn="ctr">
-              <a:lnSpc>
-                <a:spcPct val="110000"/>
-              </a:lnSpc>
-            </a:pPr>
-            <a:r>
-              <a:rPr sz="1400" b="1">
-                <a:solidFill>
-                  <a:srgbClr val="FFFFFF"/>
-                </a:solidFill>
-                <a:latin typeface="Inter"/>
-              </a:rPr>
-              <a:t>IF IT STOPS</a:t>
-            </a:r>
-          </a:p>
-        </p:txBody>
-      </p:sp>
-      <p:sp>
-        <p:nvSpPr>
-          <p:cNvPr id="4" name="TextBox 3"/>
-          <p:cNvSpPr txBox="1"/>
-          <p:nvPr/>
-        </p:nvSpPr>
-        <p:spPr>
-          <a:xfrm>
-            <a:off x="548640" y="1463040"/>
-            <a:ext cx="3383280" cy="1463040"/>
-          </a:xfrm>
-          <a:prstGeom prst="rect">
-            <a:avLst/>
-          </a:prstGeom>
-          <a:noFill/>
-        </p:spPr>
-        <p:txBody>
-          <a:bodyPr wrap="square" lIns="0" rIns="0" tIns="0" bIns="0" anchor="t"/>
-          <a:lstStyle/>
-          <a:p>
-            <a:pPr algn="l">
-              <a:lnSpc>
-                <a:spcPct val="105000"/>
-              </a:lnSpc>
-            </a:pPr>
-            <a:r>
-              <a:rPr sz="3000" b="1">
-                <a:solidFill>
-                  <a:srgbClr val="171717"/>
-                </a:solidFill>
-                <a:latin typeface="Inter"/>
-              </a:rPr>
-              <a:t>It says “Fix these first.”</a:t>
-            </a:r>
-          </a:p>
-        </p:txBody>
-      </p:sp>
-      <p:sp>
-        <p:nvSpPr>
-          <p:cNvPr id="5" name="TextBox 4"/>
-          <p:cNvSpPr txBox="1"/>
-          <p:nvPr/>
-        </p:nvSpPr>
-        <p:spPr>
-          <a:xfrm>
-            <a:off x="548640" y="3108960"/>
-            <a:ext cx="3291840" cy="3566160"/>
-          </a:xfrm>
-          <a:prstGeom prst="rect">
-            <a:avLst/>
-          </a:prstGeom>
-          <a:noFill/>
-        </p:spPr>
-        <p:txBody>
-          <a:bodyPr wrap="square" lIns="0" rIns="0" tIns="0" bIns="0" anchor="t"/>
-          <a:lstStyle/>
-          <a:p>
-            <a:pPr algn="l">
-              <a:lnSpc>
-                <a:spcPct val="120000"/>
-              </a:lnSpc>
-            </a:pPr>
-            <a:r>
-              <a:rPr sz="2000" b="0">
-                <a:solidFill>
-                  <a:srgbClr val="6B6B6B"/>
-                </a:solidFill>
-                <a:latin typeface="Inter"/>
-              </a:rPr>
-              <a:t>That means a blue cell is empty or wrong.</a:t>
-            </a:r>
-          </a:p>
-          <a:p>
-            <a:pPr algn="l">
-              <a:lnSpc>
-                <a:spcPct val="120000"/>
-              </a:lnSpc>
-              <a:spcBef>
-                <a:spcPts val="1200"/>
-              </a:spcBef>
-            </a:pPr>
-            <a:r>
-              <a:rPr sz="2000" b="1">
-                <a:solidFill>
-                  <a:srgbClr val="6B6B6B"/>
-                </a:solidFill>
-                <a:latin typeface="Inter"/>
-              </a:rPr>
-              <a:t>Read the list. </a:t>
-            </a:r>
-            <a:r>
-              <a:rPr sz="2000" b="0">
-                <a:solidFill>
-                  <a:srgbClr val="6B6B6B"/>
-                </a:solidFill>
-                <a:latin typeface="Inter"/>
-              </a:rPr>
-              <a:t>Fix those cells. Click </a:t>
-            </a:r>
-            <a:r>
-              <a:rPr sz="2000" b="1">
-                <a:solidFill>
-                  <a:srgbClr val="6B6B6B"/>
-                </a:solidFill>
-                <a:latin typeface="Inter"/>
-              </a:rPr>
-              <a:t>Make PDF</a:t>
-            </a:r>
-            <a:r>
-              <a:rPr sz="2000" b="0">
-                <a:solidFill>
-                  <a:srgbClr val="6B6B6B"/>
-                </a:solidFill>
-                <a:latin typeface="Inter"/>
-              </a:rPr>
-              <a:t> again.</a:t>
-            </a:r>
-          </a:p>
-        </p:txBody>
-      </p:sp>
-      <p:pic>
-        <p:nvPicPr>
-          <p:cNvPr id="6" name="Picture 5" descr="fix-380-150-900-620.png"/>
-          <p:cNvPicPr>
-            <a:picLocks noChangeAspect="1"/>
-          </p:cNvPicPr>
-          <p:nvPr/>
-        </p:nvPicPr>
-        <p:blipFill>
-          <a:blip r:embed="rId2"/>
-          <a:stretch>
-            <a:fillRect/>
-          </a:stretch>
-        </p:blipFill>
-        <p:spPr>
-          <a:xfrm>
-            <a:off x="4160520" y="777240"/>
-            <a:ext cx="7635240" cy="5259831"/>
-          </a:xfrm>
-          <a:prstGeom prst="rect">
-            <a:avLst/>
-          </a:prstGeom>
-        </p:spPr>
-      </p:pic>
-      <p:sp>
-        <p:nvSpPr>
-          <p:cNvPr id="7" name="Rounded Rectangle 6"/>
-          <p:cNvSpPr/>
-          <p:nvPr/>
-        </p:nvSpPr>
-        <p:spPr>
-          <a:xfrm>
-            <a:off x="4160520" y="777240"/>
-            <a:ext cx="7635240" cy="5259831"/>
-          </a:xfrm>
-          <a:prstGeom prst="roundRect">
-            <a:avLst>
-              <a:gd name="adj" fmla="val 1043"/>
-            </a:avLst>
-          </a:prstGeom>
-          <a:noFill/>
-          <a:ln w="9525">
-            <a:solidFill>
-              <a:srgbClr val="DADCE0"/>
-            </a:solidFill>
-          </a:ln>
-          <a:effectLst/>
-        </p:spPr>
-        <p:style>
-          <a:lnRef idx="1">
-            <a:schemeClr val="accent1"/>
-          </a:lnRef>
-          <a:fillRef idx="3">
-            <a:schemeClr val="accent1"/>
-          </a:fillRef>
-          <a:effectRef idx="0">
-            <a:schemeClr val="accent1"/>
-          </a:effectRef>
-          <a:fontRef idx="minor">
-            <a:schemeClr val="lt1"/>
-          </a:fontRef>
-        </p:style>
-        <p:txBody>
-          <a:bodyPr rtlCol="0" anchor="ctr"/>
-          <a:lstStyle/>
-          <a:p>
-            <a:pPr algn="ctr"/>
-          </a:p>
-        </p:txBody>
-      </p:sp>
-      <p:sp>
-        <p:nvSpPr>
-          <p:cNvPr id="8" name="Oval 7"/>
-          <p:cNvSpPr/>
-          <p:nvPr/>
-        </p:nvSpPr>
-        <p:spPr>
-          <a:xfrm>
-            <a:off x="5433060" y="1795272"/>
-            <a:ext cx="4581144" cy="1874875"/>
-          </a:xfrm>
-          <a:prstGeom prst="ellipse">
-            <a:avLst/>
-          </a:prstGeom>
-          <a:noFill/>
-          <a:ln w="57150">
-            <a:solidFill>
-              <a:srgbClr val="E8382F"/>
-            </a:solidFill>
-          </a:ln>
-          <a:effectLst/>
-        </p:spPr>
-        <p:style>
-          <a:lnRef idx="1">
-            <a:schemeClr val="accent1"/>
-          </a:lnRef>
-          <a:fillRef idx="3">
-            <a:schemeClr val="accent1"/>
-          </a:fillRef>
-          <a:effectRef idx="0">
-            <a:schemeClr val="accent1"/>
-          </a:effectRef>
-          <a:fontRef idx="minor">
-            <a:schemeClr val="lt1"/>
-          </a:fontRef>
-        </p:style>
-        <p:txBody>
-          <a:bodyPr rtlCol="0" anchor="ctr"/>
-          <a:lstStyle/>
-          <a:p>
-            <a:pPr algn="ctr"/>
-          </a:p>
-        </p:txBody>
-      </p:sp>
-      <p:sp>
-        <p:nvSpPr>
-          <p:cNvPr id="9" name="Rounded Rectangle 8"/>
-          <p:cNvSpPr/>
-          <p:nvPr/>
-        </p:nvSpPr>
-        <p:spPr>
-          <a:xfrm>
-            <a:off x="6489191" y="1292352"/>
-            <a:ext cx="2468880" cy="420624"/>
-          </a:xfrm>
-          <a:prstGeom prst="roundRect">
-            <a:avLst>
-              <a:gd name="adj" fmla="val 50000"/>
-            </a:avLst>
-          </a:prstGeom>
-          <a:solidFill>
-            <a:srgbClr val="E8382F"/>
-          </a:solidFill>
-          <a:ln>
-            <a:noFill/>
-          </a:ln>
-          <a:effectLst/>
-        </p:spPr>
-        <p:style>
-          <a:lnRef idx="1">
-            <a:schemeClr val="accent1"/>
-          </a:lnRef>
-          <a:fillRef idx="3">
-            <a:schemeClr val="accent1"/>
-          </a:fillRef>
-          <a:effectRef idx="0">
-            <a:schemeClr val="accent1"/>
-          </a:effectRef>
-          <a:fontRef idx="minor">
-            <a:schemeClr val="lt1"/>
-          </a:fontRef>
-        </p:style>
-        <p:txBody>
-          <a:bodyPr rtlCol="0" anchor="ctr"/>
-          <a:lstStyle/>
-          <a:p>
-            <a:pPr algn="ctr"/>
-          </a:p>
-        </p:txBody>
-      </p:sp>
-      <p:sp>
-        <p:nvSpPr>
-          <p:cNvPr id="10" name="TextBox 9"/>
-          <p:cNvSpPr txBox="1"/>
-          <p:nvPr/>
-        </p:nvSpPr>
-        <p:spPr>
-          <a:xfrm>
-            <a:off x="6489191" y="1292352"/>
-            <a:ext cx="2468880" cy="420624"/>
-          </a:xfrm>
-          <a:prstGeom prst="rect">
-            <a:avLst/>
-          </a:prstGeom>
-          <a:noFill/>
-        </p:spPr>
-        <p:txBody>
-          <a:bodyPr wrap="square" lIns="0" rIns="0" tIns="0" bIns="0" anchor="ctr"/>
-          <a:lstStyle/>
-          <a:p>
-            <a:pPr algn="ctr">
-              <a:lnSpc>
-                <a:spcPct val="110000"/>
-              </a:lnSpc>
-            </a:pPr>
-            <a:r>
-              <a:rPr sz="1600" b="1">
-                <a:solidFill>
-                  <a:srgbClr val="FFFFFF"/>
-                </a:solidFill>
-                <a:latin typeface="Inter"/>
-              </a:rPr>
-              <a:t>Read this list</a:t>
-            </a:r>
-          </a:p>
-        </p:txBody>
-      </p:sp>
-    </p:spTree>
-  </p:cSld>
-  <p:clrMapOvr>
-    <a:masterClrMapping/>
-  </p:clrMapOvr>
-</p:sld>
-</file>
-
-<file path=ppt/slides/slide12.xml><?xml version="1.0" encoding="utf-8"?>
-<p:sld xmlns:a="http://schemas.openxmlformats.org/drawingml/2006/main" xmlns:p="http://schemas.openxmlformats.org/presentationml/2006/main" xmlns:r="http://schemas.openxmlformats.org/officeDocument/2006/relationships">
-  <p:cSld>
-    <p:bg>
-      <p:bgPr>
-        <a:solidFill>
-          <a:srgbClr val="FFFFFF"/>
-        </a:solidFill>
-        <a:effectLst/>
-      </p:bgPr>
-    </p:bg>
-    <p:spTree>
-      <p:nvGrpSpPr>
-        <p:cNvPr id="1" name=""/>
-        <p:cNvGrpSpPr/>
-        <p:nvPr/>
-      </p:nvGrpSpPr>
-      <p:grpSpPr/>
-      <p:sp>
-        <p:nvSpPr>
-          <p:cNvPr id="2" name="Rounded Rectangle 1"/>
-          <p:cNvSpPr/>
-          <p:nvPr/>
-        </p:nvSpPr>
-        <p:spPr>
-          <a:xfrm>
-            <a:off x="548640" y="777240"/>
-            <a:ext cx="1005840" cy="457200"/>
-          </a:xfrm>
-          <a:prstGeom prst="roundRect">
-            <a:avLst>
-              <a:gd name="adj" fmla="val 50000"/>
-            </a:avLst>
-          </a:prstGeom>
-          <a:solidFill>
-            <a:srgbClr val="0096CF"/>
-          </a:solidFill>
-          <a:ln>
-            <a:noFill/>
-          </a:ln>
-          <a:effectLst/>
-        </p:spPr>
-        <p:style>
-          <a:lnRef idx="1">
-            <a:schemeClr val="accent1"/>
-          </a:lnRef>
-          <a:fillRef idx="3">
-            <a:schemeClr val="accent1"/>
-          </a:fillRef>
-          <a:effectRef idx="0">
-            <a:schemeClr val="accent1"/>
-          </a:effectRef>
-          <a:fontRef idx="minor">
-            <a:schemeClr val="lt1"/>
-          </a:fontRef>
-        </p:style>
-        <p:txBody>
-          <a:bodyPr rtlCol="0" anchor="ctr"/>
-          <a:lstStyle/>
-          <a:p>
-            <a:pPr algn="ctr"/>
-          </a:p>
-        </p:txBody>
-      </p:sp>
-      <p:sp>
-        <p:nvSpPr>
-          <p:cNvPr id="3" name="TextBox 2"/>
-          <p:cNvSpPr txBox="1"/>
-          <p:nvPr/>
-        </p:nvSpPr>
-        <p:spPr>
-          <a:xfrm>
-            <a:off x="548640" y="777240"/>
-            <a:ext cx="1005840" cy="457200"/>
-          </a:xfrm>
-          <a:prstGeom prst="rect">
-            <a:avLst/>
-          </a:prstGeom>
-          <a:noFill/>
-        </p:spPr>
-        <p:txBody>
-          <a:bodyPr wrap="square" lIns="0" rIns="0" tIns="0" bIns="0" anchor="ctr"/>
-          <a:lstStyle/>
-          <a:p>
-            <a:pPr algn="ctr">
-              <a:lnSpc>
-                <a:spcPct val="110000"/>
-              </a:lnSpc>
-            </a:pPr>
-            <a:r>
-              <a:rPr sz="1400" b="1">
-                <a:solidFill>
-                  <a:srgbClr val="FFFFFF"/>
-                </a:solidFill>
-                <a:latin typeface="Inter"/>
-              </a:rPr>
-              <a:t>PRICES</a:t>
-            </a:r>
-          </a:p>
-        </p:txBody>
-      </p:sp>
-      <p:sp>
-        <p:nvSpPr>
-          <p:cNvPr id="4" name="TextBox 3"/>
-          <p:cNvSpPr txBox="1"/>
-          <p:nvPr/>
-        </p:nvSpPr>
-        <p:spPr>
-          <a:xfrm>
-            <a:off x="548640" y="1463040"/>
-            <a:ext cx="3383280" cy="1463040"/>
-          </a:xfrm>
-          <a:prstGeom prst="rect">
-            <a:avLst/>
-          </a:prstGeom>
-          <a:noFill/>
-        </p:spPr>
-        <p:txBody>
-          <a:bodyPr wrap="square" lIns="0" rIns="0" tIns="0" bIns="0" anchor="t"/>
-          <a:lstStyle/>
-          <a:p>
-            <a:pPr algn="l">
-              <a:lnSpc>
-                <a:spcPct val="105000"/>
-              </a:lnSpc>
-            </a:pPr>
-            <a:r>
-              <a:rPr sz="3000" b="1">
-                <a:solidFill>
-                  <a:srgbClr val="171717"/>
-                </a:solidFill>
-                <a:latin typeface="Inter"/>
-              </a:rPr>
-              <a:t>Change a price.</a:t>
-            </a:r>
-          </a:p>
-        </p:txBody>
-      </p:sp>
-      <p:sp>
-        <p:nvSpPr>
-          <p:cNvPr id="5" name="TextBox 4"/>
-          <p:cNvSpPr txBox="1"/>
-          <p:nvPr/>
-        </p:nvSpPr>
-        <p:spPr>
-          <a:xfrm>
-            <a:off x="548640" y="3108960"/>
-            <a:ext cx="3291840" cy="3566160"/>
-          </a:xfrm>
-          <a:prstGeom prst="rect">
-            <a:avLst/>
-          </a:prstGeom>
-          <a:noFill/>
-        </p:spPr>
-        <p:txBody>
-          <a:bodyPr wrap="square" lIns="0" rIns="0" tIns="0" bIns="0" anchor="t"/>
-          <a:lstStyle/>
-          <a:p>
-            <a:pPr algn="l">
-              <a:lnSpc>
-                <a:spcPct val="120000"/>
-              </a:lnSpc>
-            </a:pPr>
-            <a:r>
-              <a:rPr sz="2000" b="0">
-                <a:solidFill>
-                  <a:srgbClr val="6B6B6B"/>
-                </a:solidFill>
-                <a:latin typeface="Inter"/>
-              </a:rPr>
-              <a:t>Go to the </a:t>
-            </a:r>
-            <a:r>
-              <a:rPr sz="2000" b="1">
-                <a:solidFill>
-                  <a:srgbClr val="6B6B6B"/>
-                </a:solidFill>
-                <a:latin typeface="Inter"/>
-              </a:rPr>
-              <a:t>Packages</a:t>
-            </a:r>
-            <a:r>
-              <a:rPr sz="2000" b="0">
-                <a:solidFill>
-                  <a:srgbClr val="6B6B6B"/>
-                </a:solidFill>
-                <a:latin typeface="Inter"/>
-              </a:rPr>
-              <a:t> tab. Type the new price.</a:t>
-            </a:r>
-          </a:p>
-          <a:p>
-            <a:pPr algn="l">
-              <a:lnSpc>
-                <a:spcPct val="120000"/>
-              </a:lnSpc>
-              <a:spcBef>
-                <a:spcPts val="1200"/>
-              </a:spcBef>
-            </a:pPr>
-            <a:r>
-              <a:rPr sz="2000" b="1">
-                <a:solidFill>
-                  <a:srgbClr val="6B6B6B"/>
-                </a:solidFill>
-                <a:latin typeface="Inter"/>
-              </a:rPr>
-              <a:t>Red rows</a:t>
-            </a:r>
-            <a:r>
-              <a:rPr sz="2000" b="0">
-                <a:solidFill>
-                  <a:srgbClr val="6B6B6B"/>
-                </a:solidFill>
-                <a:latin typeface="Inter"/>
-              </a:rPr>
-              <a:t> have fake prices. Put the real price in, then delete the word PLACEHOLDER.</a:t>
-            </a:r>
-          </a:p>
-        </p:txBody>
-      </p:sp>
-      <p:pic>
-        <p:nvPicPr>
-          <p:cNvPr id="6" name="Picture 5" descr="packages-500-180-960-640.png"/>
-          <p:cNvPicPr>
-            <a:picLocks noChangeAspect="1"/>
-          </p:cNvPicPr>
-          <p:nvPr/>
-        </p:nvPicPr>
-        <p:blipFill>
-          <a:blip r:embed="rId2"/>
-          <a:stretch>
-            <a:fillRect/>
-          </a:stretch>
-        </p:blipFill>
-        <p:spPr>
-          <a:xfrm>
-            <a:off x="4160520" y="777240"/>
-            <a:ext cx="7635240" cy="5090160"/>
-          </a:xfrm>
-          <a:prstGeom prst="rect">
-            <a:avLst/>
-          </a:prstGeom>
-        </p:spPr>
-      </p:pic>
-      <p:sp>
-        <p:nvSpPr>
-          <p:cNvPr id="7" name="Rounded Rectangle 6"/>
-          <p:cNvSpPr/>
-          <p:nvPr/>
-        </p:nvSpPr>
-        <p:spPr>
-          <a:xfrm>
-            <a:off x="4160520" y="777240"/>
-            <a:ext cx="7635240" cy="5090160"/>
-          </a:xfrm>
-          <a:prstGeom prst="roundRect">
-            <a:avLst>
-              <a:gd name="adj" fmla="val 1077"/>
-            </a:avLst>
-          </a:prstGeom>
-          <a:noFill/>
-          <a:ln w="9525">
-            <a:solidFill>
-              <a:srgbClr val="DADCE0"/>
-            </a:solidFill>
-          </a:ln>
-          <a:effectLst/>
-        </p:spPr>
-        <p:style>
-          <a:lnRef idx="1">
-            <a:schemeClr val="accent1"/>
-          </a:lnRef>
-          <a:fillRef idx="3">
-            <a:schemeClr val="accent1"/>
-          </a:fillRef>
-          <a:effectRef idx="0">
-            <a:schemeClr val="accent1"/>
-          </a:effectRef>
-          <a:fontRef idx="minor">
-            <a:schemeClr val="lt1"/>
-          </a:fontRef>
-        </p:style>
-        <p:txBody>
-          <a:bodyPr rtlCol="0" anchor="ctr"/>
-          <a:lstStyle/>
-          <a:p>
-            <a:pPr algn="ctr"/>
-          </a:p>
-        </p:txBody>
-      </p:sp>
-      <p:sp>
-        <p:nvSpPr>
-          <p:cNvPr id="8" name="Oval 7"/>
-          <p:cNvSpPr/>
-          <p:nvPr/>
-        </p:nvSpPr>
-        <p:spPr>
-          <a:xfrm>
-            <a:off x="8347971" y="2896814"/>
-            <a:ext cx="1193006" cy="397668"/>
-          </a:xfrm>
-          <a:prstGeom prst="ellipse">
-            <a:avLst/>
-          </a:prstGeom>
-          <a:noFill/>
-          <a:ln w="57150">
-            <a:solidFill>
-              <a:srgbClr val="E8382F"/>
-            </a:solidFill>
-          </a:ln>
-          <a:effectLst/>
-        </p:spPr>
-        <p:style>
-          <a:lnRef idx="1">
-            <a:schemeClr val="accent1"/>
-          </a:lnRef>
-          <a:fillRef idx="3">
-            <a:schemeClr val="accent1"/>
-          </a:fillRef>
-          <a:effectRef idx="0">
-            <a:schemeClr val="accent1"/>
-          </a:effectRef>
-          <a:fontRef idx="minor">
-            <a:schemeClr val="lt1"/>
-          </a:fontRef>
-        </p:style>
-        <p:txBody>
-          <a:bodyPr rtlCol="0" anchor="ctr"/>
-          <a:lstStyle/>
-          <a:p>
-            <a:pPr algn="ctr"/>
-          </a:p>
-        </p:txBody>
-      </p:sp>
-      <p:sp>
-        <p:nvSpPr>
-          <p:cNvPr id="9" name="Oval 8"/>
-          <p:cNvSpPr/>
-          <p:nvPr/>
-        </p:nvSpPr>
-        <p:spPr>
-          <a:xfrm>
-            <a:off x="9381910" y="2896814"/>
-            <a:ext cx="2067877" cy="397668"/>
-          </a:xfrm>
-          <a:prstGeom prst="ellipse">
-            <a:avLst/>
-          </a:prstGeom>
-          <a:noFill/>
-          <a:ln w="57150">
-            <a:solidFill>
-              <a:srgbClr val="E8382F"/>
-            </a:solidFill>
-          </a:ln>
-          <a:effectLst/>
-        </p:spPr>
-        <p:style>
-          <a:lnRef idx="1">
-            <a:schemeClr val="accent1"/>
-          </a:lnRef>
-          <a:fillRef idx="3">
-            <a:schemeClr val="accent1"/>
-          </a:fillRef>
-          <a:effectRef idx="0">
-            <a:schemeClr val="accent1"/>
-          </a:effectRef>
-          <a:fontRef idx="minor">
-            <a:schemeClr val="lt1"/>
-          </a:fontRef>
-        </p:style>
-        <p:txBody>
-          <a:bodyPr rtlCol="0" anchor="ctr"/>
-          <a:lstStyle/>
-          <a:p>
-            <a:pPr algn="ctr"/>
-          </a:p>
-        </p:txBody>
-      </p:sp>
-      <p:sp>
-        <p:nvSpPr>
-          <p:cNvPr id="10" name="Rounded Rectangle 9"/>
-          <p:cNvSpPr/>
-          <p:nvPr/>
-        </p:nvSpPr>
-        <p:spPr>
-          <a:xfrm>
-            <a:off x="9181409" y="3367635"/>
-            <a:ext cx="2468880" cy="420624"/>
-          </a:xfrm>
-          <a:prstGeom prst="roundRect">
-            <a:avLst>
-              <a:gd name="adj" fmla="val 50000"/>
-            </a:avLst>
-          </a:prstGeom>
-          <a:solidFill>
-            <a:srgbClr val="E8382F"/>
-          </a:solidFill>
-          <a:ln>
-            <a:noFill/>
-          </a:ln>
-          <a:effectLst/>
-        </p:spPr>
-        <p:style>
-          <a:lnRef idx="1">
-            <a:schemeClr val="accent1"/>
-          </a:lnRef>
-          <a:fillRef idx="3">
-            <a:schemeClr val="accent1"/>
-          </a:fillRef>
-          <a:effectRef idx="0">
-            <a:schemeClr val="accent1"/>
-          </a:effectRef>
-          <a:fontRef idx="minor">
-            <a:schemeClr val="lt1"/>
-          </a:fontRef>
-        </p:style>
-        <p:txBody>
-          <a:bodyPr rtlCol="0" anchor="ctr"/>
-          <a:lstStyle/>
-          <a:p>
-            <a:pPr algn="ctr"/>
-          </a:p>
-        </p:txBody>
-      </p:sp>
-      <p:sp>
-        <p:nvSpPr>
-          <p:cNvPr id="11" name="TextBox 10"/>
-          <p:cNvSpPr txBox="1"/>
-          <p:nvPr/>
-        </p:nvSpPr>
-        <p:spPr>
-          <a:xfrm>
-            <a:off x="9181409" y="3367635"/>
-            <a:ext cx="2468880" cy="420624"/>
-          </a:xfrm>
-          <a:prstGeom prst="rect">
-            <a:avLst/>
-          </a:prstGeom>
-          <a:noFill/>
-        </p:spPr>
-        <p:txBody>
-          <a:bodyPr wrap="square" lIns="0" rIns="0" tIns="0" bIns="0" anchor="ctr"/>
-          <a:lstStyle/>
-          <a:p>
-            <a:pPr algn="ctr">
-              <a:lnSpc>
-                <a:spcPct val="110000"/>
-              </a:lnSpc>
-            </a:pPr>
-            <a:r>
-              <a:rPr sz="1600" b="1">
-                <a:solidFill>
-                  <a:srgbClr val="FFFFFF"/>
-                </a:solidFill>
-                <a:latin typeface="Inter"/>
-              </a:rPr>
-              <a:t>Fake price: fix these</a:t>
-            </a:r>
-          </a:p>
-        </p:txBody>
-      </p:sp>
-    </p:spTree>
-  </p:cSld>
-  <p:clrMapOvr>
-    <a:masterClrMapping/>
-  </p:clrMapOvr>
-</p:sld>
-</file>
-
-<file path=ppt/slides/slide13.xml><?xml version="1.0" encoding="utf-8"?>
-<p:sld xmlns:a="http://schemas.openxmlformats.org/drawingml/2006/main" xmlns:p="http://schemas.openxmlformats.org/presentationml/2006/main" xmlns:r="http://schemas.openxmlformats.org/officeDocument/2006/relationships">
-  <p:cSld>
-    <p:bg>
-      <p:bgPr>
-        <a:solidFill>
-          <a:srgbClr val="FFFFFF"/>
-        </a:solidFill>
-        <a:effectLst/>
-      </p:bgPr>
-    </p:bg>
-    <p:spTree>
-      <p:nvGrpSpPr>
-        <p:cNvPr id="1" name=""/>
-        <p:cNvGrpSpPr/>
-        <p:nvPr/>
-      </p:nvGrpSpPr>
-      <p:grpSpPr/>
-      <p:sp>
-        <p:nvSpPr>
-          <p:cNvPr id="2" name="TextBox 1"/>
-          <p:cNvSpPr txBox="1"/>
-          <p:nvPr/>
-        </p:nvSpPr>
-        <p:spPr>
-          <a:xfrm>
-            <a:off x="822960" y="822960"/>
-            <a:ext cx="10058400" cy="731520"/>
-          </a:xfrm>
-          <a:prstGeom prst="rect">
-            <a:avLst/>
-          </a:prstGeom>
-          <a:noFill/>
-        </p:spPr>
-        <p:txBody>
-          <a:bodyPr wrap="square" lIns="0" rIns="0" tIns="0" bIns="0" anchor="t"/>
-          <a:lstStyle/>
-          <a:p>
-            <a:pPr algn="l">
-              <a:lnSpc>
-                <a:spcPct val="110000"/>
-              </a:lnSpc>
-            </a:pPr>
-            <a:r>
-              <a:rPr sz="3600" b="1">
-                <a:solidFill>
-                  <a:srgbClr val="171717"/>
-                </a:solidFill>
-                <a:latin typeface="Inter"/>
-              </a:rPr>
-              <a:t>Three rules</a:t>
-            </a:r>
-          </a:p>
-        </p:txBody>
-      </p:sp>
-      <p:sp>
-        <p:nvSpPr>
-          <p:cNvPr id="3" name="Rounded Rectangle 2"/>
-          <p:cNvSpPr/>
-          <p:nvPr/>
-        </p:nvSpPr>
-        <p:spPr>
-          <a:xfrm>
-            <a:off x="822960" y="1965960"/>
-            <a:ext cx="10515600" cy="1143000"/>
-          </a:xfrm>
-          <a:prstGeom prst="roundRect">
-            <a:avLst>
-              <a:gd name="adj" fmla="val 14399"/>
+              <a:gd name="adj" fmla="val 6896"/>
             </a:avLst>
           </a:prstGeom>
           <a:solidFill>
@@ -4662,14 +3223,14 @@
       </p:sp>
       <p:sp>
         <p:nvSpPr>
-          <p:cNvPr id="4" name="TextBox 3"/>
+          <p:cNvPr id="5" name="TextBox 4"/>
           <p:cNvSpPr txBox="1"/>
           <p:nvPr/>
         </p:nvSpPr>
         <p:spPr>
           <a:xfrm>
-            <a:off x="1188720" y="2167128"/>
-            <a:ext cx="548640" cy="731520"/>
+            <a:off x="1188720" y="3063240"/>
+            <a:ext cx="2560320" cy="640080"/>
           </a:xfrm>
           <a:prstGeom prst="rect">
             <a:avLst/>
@@ -4686,7 +3247,7 @@
               </a:lnSpc>
             </a:pPr>
             <a:r>
-              <a:rPr sz="3000" b="1">
+              <a:rPr sz="4000" b="1">
                 <a:solidFill>
                   <a:srgbClr val="0096CF"/>
                 </a:solidFill>
@@ -4699,14 +3260,14 @@
       </p:sp>
       <p:sp>
         <p:nvSpPr>
-          <p:cNvPr id="5" name="TextBox 4"/>
+          <p:cNvPr id="6" name="TextBox 5"/>
           <p:cNvSpPr txBox="1"/>
           <p:nvPr/>
         </p:nvSpPr>
         <p:spPr>
           <a:xfrm>
-            <a:off x="1920240" y="2148840"/>
-            <a:ext cx="9144000" cy="457200"/>
+            <a:off x="1188720" y="3931920"/>
+            <a:ext cx="2651760" cy="822960"/>
           </a:xfrm>
           <a:prstGeom prst="rect">
             <a:avLst/>
@@ -4729,21 +3290,21 @@
                 </a:solidFill>
                 <a:latin typeface="Inter"/>
               </a:rPr>
-              <a:t>Only type in blue cells.</a:t>
-            </a:r>
-          </a:p>
-        </p:txBody>
-      </p:sp>
-      <p:sp>
-        <p:nvSpPr>
-          <p:cNvPr id="6" name="TextBox 5"/>
+              <a:t>Pick a package</a:t>
+            </a:r>
+          </a:p>
+        </p:txBody>
+      </p:sp>
+      <p:sp>
+        <p:nvSpPr>
+          <p:cNvPr id="7" name="TextBox 6"/>
           <p:cNvSpPr txBox="1"/>
           <p:nvPr/>
         </p:nvSpPr>
         <p:spPr>
           <a:xfrm>
-            <a:off x="1920240" y="2587752"/>
-            <a:ext cx="9144000" cy="411480"/>
+            <a:off x="1188720" y="4617720"/>
+            <a:ext cx="2651760" cy="640080"/>
           </a:xfrm>
           <a:prstGeom prst="rect">
             <a:avLst/>
@@ -4760,31 +3321,68 @@
               </a:lnSpc>
             </a:pPr>
             <a:r>
-              <a:rPr sz="1600" b="0">
+              <a:rPr sz="1500" b="0">
                 <a:solidFill>
                   <a:srgbClr val="6B6B6B"/>
                 </a:solidFill>
                 <a:latin typeface="Inter"/>
               </a:rPr>
-              <a:t>Everything else fills itself in.</a:t>
-            </a:r>
-          </a:p>
-        </p:txBody>
-      </p:sp>
-      <p:sp>
-        <p:nvSpPr>
-          <p:cNvPr id="7" name="Rounded Rectangle 6"/>
+              <a:t>Live Zoom, or Live Zoom + Cocktail hour</a:t>
+            </a:r>
+          </a:p>
+        </p:txBody>
+      </p:sp>
+      <p:sp>
+        <p:nvSpPr>
+          <p:cNvPr id="8" name="TextBox 7"/>
+          <p:cNvSpPr txBox="1"/>
+          <p:nvPr/>
+        </p:nvSpPr>
+        <p:spPr>
+          <a:xfrm>
+            <a:off x="4096512" y="3749039"/>
+            <a:ext cx="365760" cy="548640"/>
+          </a:xfrm>
+          <a:prstGeom prst="rect">
+            <a:avLst/>
+          </a:prstGeom>
+          <a:noFill/>
+        </p:spPr>
+        <p:txBody>
+          <a:bodyPr wrap="square" lIns="0" rIns="0" tIns="0" bIns="0" anchor="t"/>
+          <a:lstStyle/>
+          <a:p>
+            <a:pPr algn="ctr">
+              <a:lnSpc>
+                <a:spcPct val="110000"/>
+              </a:lnSpc>
+            </a:pPr>
+            <a:r>
+              <a:rPr sz="2800" b="1">
+                <a:solidFill>
+                  <a:srgbClr val="6B6B6B"/>
+                </a:solidFill>
+                <a:latin typeface="Inter"/>
+              </a:rPr>
+              <a:t>→</a:t>
+            </a:r>
+          </a:p>
+        </p:txBody>
+      </p:sp>
+      <p:sp>
+        <p:nvSpPr>
+          <p:cNvPr id="9" name="Rounded Rectangle 8"/>
           <p:cNvSpPr/>
           <p:nvPr/>
         </p:nvSpPr>
         <p:spPr>
           <a:xfrm>
-            <a:off x="822960" y="3337560"/>
-            <a:ext cx="10515600" cy="1143000"/>
+            <a:off x="4434840" y="2743200"/>
+            <a:ext cx="3246120" cy="2651760"/>
           </a:xfrm>
           <a:prstGeom prst="roundRect">
             <a:avLst>
-              <a:gd name="adj" fmla="val 14399"/>
+              <a:gd name="adj" fmla="val 6896"/>
             </a:avLst>
           </a:prstGeom>
           <a:solidFill>
@@ -4819,14 +3417,14 @@
       </p:sp>
       <p:sp>
         <p:nvSpPr>
-          <p:cNvPr id="8" name="TextBox 7"/>
+          <p:cNvPr id="10" name="TextBox 9"/>
           <p:cNvSpPr txBox="1"/>
           <p:nvPr/>
         </p:nvSpPr>
         <p:spPr>
           <a:xfrm>
-            <a:off x="1188720" y="3538728"/>
-            <a:ext cx="548640" cy="731520"/>
+            <a:off x="4800600" y="3063240"/>
+            <a:ext cx="2560320" cy="640080"/>
           </a:xfrm>
           <a:prstGeom prst="rect">
             <a:avLst/>
@@ -4843,7 +3441,7 @@
               </a:lnSpc>
             </a:pPr>
             <a:r>
-              <a:rPr sz="3000" b="1">
+              <a:rPr sz="4000" b="1">
                 <a:solidFill>
                   <a:srgbClr val="0096CF"/>
                 </a:solidFill>
@@ -4856,14 +3454,14 @@
       </p:sp>
       <p:sp>
         <p:nvSpPr>
-          <p:cNvPr id="9" name="TextBox 8"/>
+          <p:cNvPr id="11" name="TextBox 10"/>
           <p:cNvSpPr txBox="1"/>
           <p:nvPr/>
         </p:nvSpPr>
         <p:spPr>
           <a:xfrm>
-            <a:off x="1920240" y="3520440"/>
-            <a:ext cx="9144000" cy="457200"/>
+            <a:off x="4800600" y="3931920"/>
+            <a:ext cx="2651760" cy="822960"/>
           </a:xfrm>
           <a:prstGeom prst="rect">
             <a:avLst/>
@@ -4886,21 +3484,21 @@
                 </a:solidFill>
                 <a:latin typeface="Inter"/>
               </a:rPr>
-              <a:t>Red rows are fake prices.</a:t>
-            </a:r>
-          </a:p>
-        </p:txBody>
-      </p:sp>
-      <p:sp>
-        <p:nvSpPr>
-          <p:cNvPr id="10" name="TextBox 9"/>
+              <a:t>Fill in the blue cells</a:t>
+            </a:r>
+          </a:p>
+        </p:txBody>
+      </p:sp>
+      <p:sp>
+        <p:nvSpPr>
+          <p:cNvPr id="12" name="TextBox 11"/>
           <p:cNvSpPr txBox="1"/>
           <p:nvPr/>
         </p:nvSpPr>
         <p:spPr>
           <a:xfrm>
-            <a:off x="1920240" y="3959352"/>
-            <a:ext cx="9144000" cy="411480"/>
+            <a:off x="4800600" y="4617720"/>
+            <a:ext cx="2651760" cy="640080"/>
           </a:xfrm>
           <a:prstGeom prst="rect">
             <a:avLst/>
@@ -4917,31 +3515,68 @@
               </a:lnSpc>
             </a:pPr>
             <a:r>
-              <a:rPr sz="1600" b="0">
+              <a:rPr sz="1500" b="0">
                 <a:solidFill>
                   <a:srgbClr val="6B6B6B"/>
                 </a:solidFill>
                 <a:latin typeface="Inter"/>
               </a:rPr>
-              <a:t>Fix them before quoting that package.</a:t>
-            </a:r>
-          </a:p>
-        </p:txBody>
-      </p:sp>
-      <p:sp>
-        <p:nvSpPr>
-          <p:cNvPr id="11" name="Rounded Rectangle 10"/>
+              <a:t>Client, date, days</a:t>
+            </a:r>
+          </a:p>
+        </p:txBody>
+      </p:sp>
+      <p:sp>
+        <p:nvSpPr>
+          <p:cNvPr id="13" name="TextBox 12"/>
+          <p:cNvSpPr txBox="1"/>
+          <p:nvPr/>
+        </p:nvSpPr>
+        <p:spPr>
+          <a:xfrm>
+            <a:off x="7708392" y="3749039"/>
+            <a:ext cx="365760" cy="548640"/>
+          </a:xfrm>
+          <a:prstGeom prst="rect">
+            <a:avLst/>
+          </a:prstGeom>
+          <a:noFill/>
+        </p:spPr>
+        <p:txBody>
+          <a:bodyPr wrap="square" lIns="0" rIns="0" tIns="0" bIns="0" anchor="t"/>
+          <a:lstStyle/>
+          <a:p>
+            <a:pPr algn="ctr">
+              <a:lnSpc>
+                <a:spcPct val="110000"/>
+              </a:lnSpc>
+            </a:pPr>
+            <a:r>
+              <a:rPr sz="2800" b="1">
+                <a:solidFill>
+                  <a:srgbClr val="6B6B6B"/>
+                </a:solidFill>
+                <a:latin typeface="Inter"/>
+              </a:rPr>
+              <a:t>→</a:t>
+            </a:r>
+          </a:p>
+        </p:txBody>
+      </p:sp>
+      <p:sp>
+        <p:nvSpPr>
+          <p:cNvPr id="14" name="Rounded Rectangle 13"/>
           <p:cNvSpPr/>
           <p:nvPr/>
         </p:nvSpPr>
         <p:spPr>
           <a:xfrm>
-            <a:off x="822960" y="4709160"/>
-            <a:ext cx="10515600" cy="1143000"/>
+            <a:off x="8046720" y="2743200"/>
+            <a:ext cx="3246120" cy="2651760"/>
           </a:xfrm>
           <a:prstGeom prst="roundRect">
             <a:avLst>
-              <a:gd name="adj" fmla="val 14399"/>
+              <a:gd name="adj" fmla="val 6896"/>
             </a:avLst>
           </a:prstGeom>
           <a:solidFill>
@@ -4976,14 +3611,14 @@
       </p:sp>
       <p:sp>
         <p:nvSpPr>
-          <p:cNvPr id="12" name="TextBox 11"/>
+          <p:cNvPr id="15" name="TextBox 14"/>
           <p:cNvSpPr txBox="1"/>
           <p:nvPr/>
         </p:nvSpPr>
         <p:spPr>
           <a:xfrm>
-            <a:off x="1188720" y="4910328"/>
-            <a:ext cx="548640" cy="731520"/>
+            <a:off x="8412480" y="3063240"/>
+            <a:ext cx="2560320" cy="640080"/>
           </a:xfrm>
           <a:prstGeom prst="rect">
             <a:avLst/>
@@ -5000,7 +3635,7 @@
               </a:lnSpc>
             </a:pPr>
             <a:r>
-              <a:rPr sz="3000" b="1">
+              <a:rPr sz="4000" b="1">
                 <a:solidFill>
                   <a:srgbClr val="0096CF"/>
                 </a:solidFill>
@@ -5013,14 +3648,14 @@
       </p:sp>
       <p:sp>
         <p:nvSpPr>
-          <p:cNvPr id="13" name="TextBox 12"/>
+          <p:cNvPr id="16" name="TextBox 15"/>
           <p:cNvSpPr txBox="1"/>
           <p:nvPr/>
         </p:nvSpPr>
         <p:spPr>
           <a:xfrm>
-            <a:off x="1920240" y="4892040"/>
-            <a:ext cx="9144000" cy="457200"/>
+            <a:off x="8412480" y="3931920"/>
+            <a:ext cx="2651760" cy="822960"/>
           </a:xfrm>
           <a:prstGeom prst="rect">
             <a:avLst/>
@@ -5043,21 +3678,21 @@
                 </a:solidFill>
                 <a:latin typeface="Inter"/>
               </a:rPr>
-              <a:t>Use a computer.</a:t>
-            </a:r>
-          </a:p>
-        </p:txBody>
-      </p:sp>
-      <p:sp>
-        <p:nvSpPr>
-          <p:cNvPr id="14" name="TextBox 13"/>
+              <a:t>Click Make PDF</a:t>
+            </a:r>
+          </a:p>
+        </p:txBody>
+      </p:sp>
+      <p:sp>
+        <p:nvSpPr>
+          <p:cNvPr id="17" name="TextBox 16"/>
           <p:cNvSpPr txBox="1"/>
           <p:nvPr/>
         </p:nvSpPr>
         <p:spPr>
           <a:xfrm>
-            <a:off x="1920240" y="5330952"/>
-            <a:ext cx="9144000" cy="411480"/>
+            <a:off x="8412480" y="4617720"/>
+            <a:ext cx="2651760" cy="640080"/>
           </a:xfrm>
           <a:prstGeom prst="rect">
             <a:avLst/>
@@ -5074,99 +3709,27 @@
               </a:lnSpc>
             </a:pPr>
             <a:r>
-              <a:rPr sz="1600" b="0">
+              <a:rPr sz="1500" b="0">
                 <a:solidFill>
                   <a:srgbClr val="6B6B6B"/>
                 </a:solidFill>
                 <a:latin typeface="Inter"/>
               </a:rPr>
-              <a:t>The buttons don't work in the phone app. Use the Quotes menu there.</a:t>
-            </a:r>
-          </a:p>
-        </p:txBody>
-      </p:sp>
-    </p:spTree>
-  </p:cSld>
-  <p:clrMapOvr>
-    <a:masterClrMapping/>
-  </p:clrMapOvr>
-</p:sld>
-</file>
-
-<file path=ppt/slides/slide14.xml><?xml version="1.0" encoding="utf-8"?>
-<p:sld xmlns:a="http://schemas.openxmlformats.org/drawingml/2006/main" xmlns:p="http://schemas.openxmlformats.org/presentationml/2006/main" xmlns:r="http://schemas.openxmlformats.org/officeDocument/2006/relationships">
-  <p:cSld>
-    <p:bg>
-      <p:bgPr>
-        <a:solidFill>
-          <a:srgbClr val="FFFFFF"/>
-        </a:solidFill>
-        <a:effectLst/>
-      </p:bgPr>
-    </p:bg>
-    <p:spTree>
-      <p:nvGrpSpPr>
-        <p:cNvPr id="1" name=""/>
-        <p:cNvGrpSpPr/>
-        <p:nvPr/>
-      </p:nvGrpSpPr>
-      <p:grpSpPr/>
-      <p:sp>
-        <p:nvSpPr>
-          <p:cNvPr id="2" name="Rounded Rectangle 1"/>
-          <p:cNvSpPr/>
-          <p:nvPr/>
-        </p:nvSpPr>
-        <p:spPr>
-          <a:xfrm>
-            <a:off x="548640" y="777240"/>
-            <a:ext cx="886968" cy="457200"/>
-          </a:xfrm>
-          <a:prstGeom prst="roundRect">
-            <a:avLst>
-              <a:gd name="adj" fmla="val 50000"/>
-            </a:avLst>
-          </a:prstGeom>
-          <a:solidFill>
-            <a:srgbClr val="0096CF"/>
-          </a:solidFill>
-          <a:ln>
-            <a:noFill/>
-          </a:ln>
-          <a:effectLst/>
-        </p:spPr>
-        <p:style>
-          <a:lnRef idx="1">
-            <a:schemeClr val="accent1"/>
-          </a:lnRef>
-          <a:fillRef idx="3">
-            <a:schemeClr val="accent1"/>
-          </a:fillRef>
-          <a:effectRef idx="0">
-            <a:schemeClr val="accent1"/>
-          </a:effectRef>
-          <a:fontRef idx="minor">
-            <a:schemeClr val="lt1"/>
-          </a:fontRef>
-        </p:style>
-        <p:txBody>
-          <a:bodyPr rtlCol="0" anchor="ctr"/>
-          <a:lstStyle/>
-          <a:p>
-            <a:pPr algn="ctr"/>
-          </a:p>
-        </p:txBody>
-      </p:sp>
-      <p:sp>
-        <p:nvSpPr>
-          <p:cNvPr id="3" name="TextBox 2"/>
+              <a:t>A clean one-page quote, saved in Drive</a:t>
+            </a:r>
+          </a:p>
+        </p:txBody>
+      </p:sp>
+      <p:sp>
+        <p:nvSpPr>
+          <p:cNvPr id="18" name="TextBox 17"/>
           <p:cNvSpPr txBox="1"/>
           <p:nvPr/>
         </p:nvSpPr>
         <p:spPr>
           <a:xfrm>
-            <a:off x="548640" y="777240"/>
-            <a:ext cx="886968" cy="457200"/>
+            <a:off x="822960" y="5897880"/>
+            <a:ext cx="10515600" cy="457200"/>
           </a:xfrm>
           <a:prstGeom prst="rect">
             <a:avLst/>
@@ -5174,424 +3737,31 @@
           <a:noFill/>
         </p:spPr>
         <p:txBody>
-          <a:bodyPr wrap="square" lIns="0" rIns="0" tIns="0" bIns="0" anchor="ctr"/>
-          <a:lstStyle/>
-          <a:p>
-            <a:pPr algn="ctr">
+          <a:bodyPr wrap="square" lIns="0" rIns="0" tIns="0" bIns="0" anchor="t"/>
+          <a:lstStyle/>
+          <a:p>
+            <a:pPr algn="l">
               <a:lnSpc>
                 <a:spcPct val="110000"/>
               </a:lnSpc>
             </a:pPr>
             <a:r>
-              <a:rPr sz="1400" b="1">
-                <a:solidFill>
-                  <a:srgbClr val="FFFFFF"/>
-                </a:solidFill>
-                <a:latin typeface="Inter"/>
-              </a:rPr>
-              <a:t>SETUP</a:t>
-            </a:r>
-          </a:p>
-        </p:txBody>
-      </p:sp>
-      <p:sp>
-        <p:nvSpPr>
-          <p:cNvPr id="4" name="TextBox 3"/>
-          <p:cNvSpPr txBox="1"/>
-          <p:nvPr/>
-        </p:nvSpPr>
-        <p:spPr>
-          <a:xfrm>
-            <a:off x="548640" y="1463040"/>
-            <a:ext cx="3383280" cy="1463040"/>
-          </a:xfrm>
-          <a:prstGeom prst="rect">
-            <a:avLst/>
-          </a:prstGeom>
-          <a:noFill/>
-        </p:spPr>
-        <p:txBody>
-          <a:bodyPr wrap="square" lIns="0" rIns="0" tIns="0" bIns="0" anchor="t"/>
-          <a:lstStyle/>
-          <a:p>
-            <a:pPr algn="l">
-              <a:lnSpc>
-                <a:spcPct val="105000"/>
-              </a:lnSpc>
-            </a:pPr>
-            <a:r>
-              <a:rPr sz="3000" b="1">
-                <a:solidFill>
-                  <a:srgbClr val="171717"/>
-                </a:solidFill>
-                <a:latin typeface="Inter"/>
-              </a:rPr>
-              <a:t>One-time setup.</a:t>
-            </a:r>
-          </a:p>
-        </p:txBody>
-      </p:sp>
-      <p:sp>
-        <p:nvSpPr>
-          <p:cNvPr id="5" name="TextBox 4"/>
-          <p:cNvSpPr txBox="1"/>
-          <p:nvPr/>
-        </p:nvSpPr>
-        <p:spPr>
-          <a:xfrm>
-            <a:off x="548640" y="3108960"/>
-            <a:ext cx="3291840" cy="3566160"/>
-          </a:xfrm>
-          <a:prstGeom prst="rect">
-            <a:avLst/>
-          </a:prstGeom>
-          <a:noFill/>
-        </p:spPr>
-        <p:txBody>
-          <a:bodyPr wrap="square" lIns="0" rIns="0" tIns="0" bIns="0" anchor="t"/>
-          <a:lstStyle/>
-          <a:p>
-            <a:pPr algn="l">
-              <a:lnSpc>
-                <a:spcPct val="120000"/>
-              </a:lnSpc>
-            </a:pPr>
-            <a:r>
-              <a:rPr sz="1700" b="1">
+              <a:rPr sz="1600" b="1">
                 <a:solidFill>
                   <a:srgbClr val="6B6B6B"/>
                 </a:solidFill>
                 <a:latin typeface="Inter"/>
               </a:rPr>
-              <a:t>Only do this once.</a:t>
-            </a:r>
-          </a:p>
-          <a:p>
-            <a:pPr algn="l">
-              <a:lnSpc>
-                <a:spcPct val="120000"/>
-              </a:lnSpc>
-              <a:spcBef>
-                <a:spcPts val="1019"/>
-              </a:spcBef>
-            </a:pPr>
-            <a:r>
-              <a:rPr sz="1700" b="0">
+              <a:t>No math. No line items. </a:t>
+            </a:r>
+            <a:r>
+              <a:rPr sz="1600" b="0">
                 <a:solidFill>
                   <a:srgbClr val="6B6B6B"/>
                 </a:solidFill>
                 <a:latin typeface="Inter"/>
               </a:rPr>
-              <a:t>1. Make a blank Google Sheet.</a:t>
-            </a:r>
-          </a:p>
-          <a:p>
-            <a:pPr algn="l">
-              <a:lnSpc>
-                <a:spcPct val="120000"/>
-              </a:lnSpc>
-              <a:spcBef>
-                <a:spcPts val="1019"/>
-              </a:spcBef>
-            </a:pPr>
-            <a:r>
-              <a:rPr sz="1700" b="0">
-                <a:solidFill>
-                  <a:srgbClr val="6B6B6B"/>
-                </a:solidFill>
-                <a:latin typeface="Inter"/>
-              </a:rPr>
-              <a:t>2. </a:t>
-            </a:r>
-            <a:r>
-              <a:rPr sz="1700" b="1">
-                <a:solidFill>
-                  <a:srgbClr val="6B6B6B"/>
-                </a:solidFill>
-                <a:latin typeface="Inter"/>
-              </a:rPr>
-              <a:t>Extensions › Apps Script</a:t>
-            </a:r>
-            <a:r>
-              <a:rPr sz="1700" b="0">
-                <a:solidFill>
-                  <a:srgbClr val="6B6B6B"/>
-                </a:solidFill>
-                <a:latin typeface="Inter"/>
-              </a:rPr>
-              <a:t>. Paste the script. Save.</a:t>
-            </a:r>
-          </a:p>
-          <a:p>
-            <a:pPr algn="l">
-              <a:lnSpc>
-                <a:spcPct val="120000"/>
-              </a:lnSpc>
-              <a:spcBef>
-                <a:spcPts val="1019"/>
-              </a:spcBef>
-            </a:pPr>
-            <a:r>
-              <a:rPr sz="1700" b="0">
-                <a:solidFill>
-                  <a:srgbClr val="6B6B6B"/>
-                </a:solidFill>
-                <a:latin typeface="Inter"/>
-              </a:rPr>
-              <a:t>3. Reload the sheet.</a:t>
-            </a:r>
-          </a:p>
-          <a:p>
-            <a:pPr algn="l">
-              <a:lnSpc>
-                <a:spcPct val="120000"/>
-              </a:lnSpc>
-              <a:spcBef>
-                <a:spcPts val="1019"/>
-              </a:spcBef>
-            </a:pPr>
-            <a:r>
-              <a:rPr sz="1700" b="0">
-                <a:solidFill>
-                  <a:srgbClr val="6B6B6B"/>
-                </a:solidFill>
-                <a:latin typeface="Inter"/>
-              </a:rPr>
-              <a:t>4. </a:t>
-            </a:r>
-            <a:r>
-              <a:rPr sz="1700" b="1">
-                <a:solidFill>
-                  <a:srgbClr val="6B6B6B"/>
-                </a:solidFill>
-                <a:latin typeface="Inter"/>
-              </a:rPr>
-              <a:t>Quotes › Set up sheet</a:t>
-            </a:r>
-            <a:r>
-              <a:rPr sz="1700" b="0">
-                <a:solidFill>
-                  <a:srgbClr val="6B6B6B"/>
-                </a:solidFill>
-                <a:latin typeface="Inter"/>
-              </a:rPr>
-              <a:t>. Click Allow.</a:t>
-            </a:r>
-          </a:p>
-          <a:p>
-            <a:pPr algn="l">
-              <a:lnSpc>
-                <a:spcPct val="120000"/>
-              </a:lnSpc>
-              <a:spcBef>
-                <a:spcPts val="1019"/>
-              </a:spcBef>
-            </a:pPr>
-            <a:r>
-              <a:rPr sz="1700" b="0">
-                <a:solidFill>
-                  <a:srgbClr val="6B6B6B"/>
-                </a:solidFill>
-                <a:latin typeface="Inter"/>
-              </a:rPr>
-              <a:t>5. Share it with the sales team.</a:t>
-            </a:r>
-          </a:p>
-        </p:txBody>
-      </p:sp>
-      <p:pic>
-        <p:nvPicPr>
-          <p:cNvPr id="6" name="Picture 5" descr="menu-300-0-820-580.png"/>
-          <p:cNvPicPr>
-            <a:picLocks noChangeAspect="1"/>
-          </p:cNvPicPr>
-          <p:nvPr/>
-        </p:nvPicPr>
-        <p:blipFill>
-          <a:blip r:embed="rId2"/>
-          <a:stretch>
-            <a:fillRect/>
-          </a:stretch>
-        </p:blipFill>
-        <p:spPr>
-          <a:xfrm>
-            <a:off x="4160520" y="777240"/>
-            <a:ext cx="7627357" cy="5394960"/>
-          </a:xfrm>
-          <a:prstGeom prst="rect">
-            <a:avLst/>
-          </a:prstGeom>
-        </p:spPr>
-      </p:pic>
-      <p:sp>
-        <p:nvSpPr>
-          <p:cNvPr id="7" name="Rounded Rectangle 6"/>
-          <p:cNvSpPr/>
-          <p:nvPr/>
-        </p:nvSpPr>
-        <p:spPr>
-          <a:xfrm>
-            <a:off x="4160520" y="777240"/>
-            <a:ext cx="7627357" cy="5394960"/>
-          </a:xfrm>
-          <a:prstGeom prst="roundRect">
-            <a:avLst>
-              <a:gd name="adj" fmla="val 1016"/>
-            </a:avLst>
-          </a:prstGeom>
-          <a:noFill/>
-          <a:ln w="9525">
-            <a:solidFill>
-              <a:srgbClr val="DADCE0"/>
-            </a:solidFill>
-          </a:ln>
-          <a:effectLst/>
-        </p:spPr>
-        <p:style>
-          <a:lnRef idx="1">
-            <a:schemeClr val="accent1"/>
-          </a:lnRef>
-          <a:fillRef idx="3">
-            <a:schemeClr val="accent1"/>
-          </a:fillRef>
-          <a:effectRef idx="0">
-            <a:schemeClr val="accent1"/>
-          </a:effectRef>
-          <a:fontRef idx="minor">
-            <a:schemeClr val="lt1"/>
-          </a:fontRef>
-        </p:style>
-        <p:txBody>
-          <a:bodyPr rtlCol="0" anchor="ctr"/>
-          <a:lstStyle/>
-          <a:p>
-            <a:pPr algn="ctr"/>
-          </a:p>
-        </p:txBody>
-      </p:sp>
-      <p:sp>
-        <p:nvSpPr>
-          <p:cNvPr id="8" name="Oval 7"/>
-          <p:cNvSpPr/>
-          <p:nvPr/>
-        </p:nvSpPr>
-        <p:spPr>
-          <a:xfrm>
-            <a:off x="7230066" y="2442236"/>
-            <a:ext cx="2325413" cy="511591"/>
-          </a:xfrm>
-          <a:prstGeom prst="ellipse">
-            <a:avLst/>
-          </a:prstGeom>
-          <a:noFill/>
-          <a:ln w="57150">
-            <a:solidFill>
-              <a:srgbClr val="E8382F"/>
-            </a:solidFill>
-          </a:ln>
-          <a:effectLst/>
-        </p:spPr>
-        <p:style>
-          <a:lnRef idx="1">
-            <a:schemeClr val="accent1"/>
-          </a:lnRef>
-          <a:fillRef idx="3">
-            <a:schemeClr val="accent1"/>
-          </a:fillRef>
-          <a:effectRef idx="0">
-            <a:schemeClr val="accent1"/>
-          </a:effectRef>
-          <a:fontRef idx="minor">
-            <a:schemeClr val="lt1"/>
-          </a:fontRef>
-        </p:style>
-        <p:txBody>
-          <a:bodyPr rtlCol="0" anchor="ctr"/>
-          <a:lstStyle/>
-          <a:p>
-            <a:pPr algn="ctr"/>
-          </a:p>
-        </p:txBody>
-      </p:sp>
-      <p:sp>
-        <p:nvSpPr>
-          <p:cNvPr id="9" name="Rounded Rectangle 8"/>
-          <p:cNvSpPr/>
-          <p:nvPr/>
-        </p:nvSpPr>
-        <p:spPr>
-          <a:xfrm>
-            <a:off x="7158333" y="3026979"/>
-            <a:ext cx="2468880" cy="420624"/>
-          </a:xfrm>
-          <a:prstGeom prst="roundRect">
-            <a:avLst>
-              <a:gd name="adj" fmla="val 50000"/>
-            </a:avLst>
-          </a:prstGeom>
-          <a:solidFill>
-            <a:srgbClr val="E8382F"/>
-          </a:solidFill>
-          <a:ln>
-            <a:noFill/>
-          </a:ln>
-          <a:effectLst/>
-        </p:spPr>
-        <p:style>
-          <a:lnRef idx="1">
-            <a:schemeClr val="accent1"/>
-          </a:lnRef>
-          <a:fillRef idx="3">
-            <a:schemeClr val="accent1"/>
-          </a:fillRef>
-          <a:effectRef idx="0">
-            <a:schemeClr val="accent1"/>
-          </a:effectRef>
-          <a:fontRef idx="minor">
-            <a:schemeClr val="lt1"/>
-          </a:fontRef>
-        </p:style>
-        <p:txBody>
-          <a:bodyPr rtlCol="0" anchor="ctr"/>
-          <a:lstStyle/>
-          <a:p>
-            <a:pPr algn="ctr"/>
-          </a:p>
-        </p:txBody>
-      </p:sp>
-      <p:sp>
-        <p:nvSpPr>
-          <p:cNvPr id="10" name="TextBox 9"/>
-          <p:cNvSpPr txBox="1"/>
-          <p:nvPr/>
-        </p:nvSpPr>
-        <p:spPr>
-          <a:xfrm>
-            <a:off x="7158333" y="3026979"/>
-            <a:ext cx="2468880" cy="420624"/>
-          </a:xfrm>
-          <a:prstGeom prst="rect">
-            <a:avLst/>
-          </a:prstGeom>
-          <a:noFill/>
-        </p:spPr>
-        <p:txBody>
-          <a:bodyPr wrap="square" lIns="0" rIns="0" tIns="0" bIns="0" anchor="ctr"/>
-          <a:lstStyle/>
-          <a:p>
-            <a:pPr algn="ctr">
-              <a:lnSpc>
-                <a:spcPct val="110000"/>
-              </a:lnSpc>
-            </a:pPr>
-            <a:r>
-              <a:rPr sz="1600" b="1">
-                <a:solidFill>
-                  <a:srgbClr val="FFFFFF"/>
-                </a:solidFill>
-                <a:latin typeface="Inter"/>
-              </a:rPr>
-              <a:t>Click once</a:t>
+              <a:t>Prices come from the Packages tab.</a:t>
             </a:r>
           </a:p>
         </p:txBody>
@@ -5624,59 +3794,22 @@
       <p:grpSpPr/>
       <p:sp>
         <p:nvSpPr>
-          <p:cNvPr id="2" name="TextBox 1"/>
-          <p:cNvSpPr txBox="1"/>
-          <p:nvPr/>
-        </p:nvSpPr>
-        <p:spPr>
-          <a:xfrm>
-            <a:off x="822960" y="822960"/>
-            <a:ext cx="10058400" cy="731520"/>
-          </a:xfrm>
-          <a:prstGeom prst="rect">
-            <a:avLst/>
-          </a:prstGeom>
-          <a:noFill/>
-        </p:spPr>
-        <p:txBody>
-          <a:bodyPr wrap="square" lIns="0" rIns="0" tIns="0" bIns="0" anchor="t"/>
-          <a:lstStyle/>
-          <a:p>
-            <a:pPr algn="l">
-              <a:lnSpc>
-                <a:spcPct val="110000"/>
-              </a:lnSpc>
-            </a:pPr>
-            <a:r>
-              <a:rPr sz="3600" b="1">
-                <a:solidFill>
-                  <a:srgbClr val="171717"/>
-                </a:solidFill>
-                <a:latin typeface="Inter"/>
-              </a:rPr>
-              <a:t>What it does</a:t>
-            </a:r>
-          </a:p>
-        </p:txBody>
-      </p:sp>
-      <p:sp>
-        <p:nvSpPr>
-          <p:cNvPr id="3" name="Rounded Rectangle 2"/>
+          <p:cNvPr id="2" name="Rounded Rectangle 1"/>
           <p:cNvSpPr/>
           <p:nvPr/>
         </p:nvSpPr>
         <p:spPr>
           <a:xfrm>
-            <a:off x="822960" y="2103120"/>
-            <a:ext cx="3246120" cy="2743200"/>
+            <a:off x="548640" y="777240"/>
+            <a:ext cx="1243584" cy="457200"/>
           </a:xfrm>
           <a:prstGeom prst="roundRect">
             <a:avLst>
-              <a:gd name="adj" fmla="val 6666"/>
+              <a:gd name="adj" fmla="val 50000"/>
             </a:avLst>
           </a:prstGeom>
           <a:solidFill>
-            <a:srgbClr val="F5F5F7"/>
+            <a:srgbClr val="0096CF"/>
           </a:solidFill>
           <a:ln>
             <a:noFill/>
@@ -5707,14 +3840,14 @@
       </p:sp>
       <p:sp>
         <p:nvSpPr>
-          <p:cNvPr id="4" name="TextBox 3"/>
+          <p:cNvPr id="3" name="TextBox 2"/>
           <p:cNvSpPr txBox="1"/>
           <p:nvPr/>
         </p:nvSpPr>
         <p:spPr>
           <a:xfrm>
-            <a:off x="1188720" y="2423160"/>
-            <a:ext cx="2560320" cy="640080"/>
+            <a:off x="548640" y="777240"/>
+            <a:ext cx="1243584" cy="457200"/>
           </a:xfrm>
           <a:prstGeom prst="rect">
             <a:avLst/>
@@ -5722,118 +3855,7 @@
           <a:noFill/>
         </p:spPr>
         <p:txBody>
-          <a:bodyPr wrap="square" lIns="0" rIns="0" tIns="0" bIns="0" anchor="t"/>
-          <a:lstStyle/>
-          <a:p>
-            <a:pPr algn="l">
-              <a:lnSpc>
-                <a:spcPct val="110000"/>
-              </a:lnSpc>
-            </a:pPr>
-            <a:r>
-              <a:rPr sz="4000" b="1">
-                <a:solidFill>
-                  <a:srgbClr val="0096CF"/>
-                </a:solidFill>
-                <a:latin typeface="Inter"/>
-              </a:rPr>
-              <a:t>1</a:t>
-            </a:r>
-          </a:p>
-        </p:txBody>
-      </p:sp>
-      <p:sp>
-        <p:nvSpPr>
-          <p:cNvPr id="5" name="TextBox 4"/>
-          <p:cNvSpPr txBox="1"/>
-          <p:nvPr/>
-        </p:nvSpPr>
-        <p:spPr>
-          <a:xfrm>
-            <a:off x="1188720" y="3291840"/>
-            <a:ext cx="2651760" cy="822960"/>
-          </a:xfrm>
-          <a:prstGeom prst="rect">
-            <a:avLst/>
-          </a:prstGeom>
-          <a:noFill/>
-        </p:spPr>
-        <p:txBody>
-          <a:bodyPr wrap="square" lIns="0" rIns="0" tIns="0" bIns="0" anchor="t"/>
-          <a:lstStyle/>
-          <a:p>
-            <a:pPr algn="l">
-              <a:lnSpc>
-                <a:spcPct val="110000"/>
-              </a:lnSpc>
-            </a:pPr>
-            <a:r>
-              <a:rPr sz="2200" b="1">
-                <a:solidFill>
-                  <a:srgbClr val="171717"/>
-                </a:solidFill>
-                <a:latin typeface="Inter"/>
-              </a:rPr>
-              <a:t>You type the details</a:t>
-            </a:r>
-          </a:p>
-        </p:txBody>
-      </p:sp>
-      <p:sp>
-        <p:nvSpPr>
-          <p:cNvPr id="6" name="TextBox 5"/>
-          <p:cNvSpPr txBox="1"/>
-          <p:nvPr/>
-        </p:nvSpPr>
-        <p:spPr>
-          <a:xfrm>
-            <a:off x="1188720" y="4069080"/>
-            <a:ext cx="2651760" cy="640080"/>
-          </a:xfrm>
-          <a:prstGeom prst="rect">
-            <a:avLst/>
-          </a:prstGeom>
-          <a:noFill/>
-        </p:spPr>
-        <p:txBody>
-          <a:bodyPr wrap="square" lIns="0" rIns="0" tIns="0" bIns="0" anchor="t"/>
-          <a:lstStyle/>
-          <a:p>
-            <a:pPr algn="l">
-              <a:lnSpc>
-                <a:spcPct val="110000"/>
-              </a:lnSpc>
-            </a:pPr>
-            <a:r>
-              <a:rPr sz="1600" b="0">
-                <a:solidFill>
-                  <a:srgbClr val="6B6B6B"/>
-                </a:solidFill>
-                <a:latin typeface="Inter"/>
-              </a:rPr>
-              <a:t>Client, date, package</a:t>
-            </a:r>
-          </a:p>
-        </p:txBody>
-      </p:sp>
-      <p:sp>
-        <p:nvSpPr>
-          <p:cNvPr id="7" name="TextBox 6"/>
-          <p:cNvSpPr txBox="1"/>
-          <p:nvPr/>
-        </p:nvSpPr>
-        <p:spPr>
-          <a:xfrm>
-            <a:off x="4096512" y="3108960"/>
-            <a:ext cx="365760" cy="548640"/>
-          </a:xfrm>
-          <a:prstGeom prst="rect">
-            <a:avLst/>
-          </a:prstGeom>
-          <a:noFill/>
-        </p:spPr>
-        <p:txBody>
-          <a:bodyPr wrap="square" lIns="0" rIns="0" tIns="0" bIns="0" anchor="t"/>
+          <a:bodyPr wrap="square" lIns="0" rIns="0" tIns="0" bIns="0" anchor="ctr"/>
           <a:lstStyle/>
           <a:p>
             <a:pPr algn="ctr">
@@ -5842,35 +3864,315 @@
               </a:lnSpc>
             </a:pPr>
             <a:r>
-              <a:rPr sz="2800" b="1">
+              <a:rPr sz="1400" b="1">
+                <a:solidFill>
+                  <a:srgbClr val="FFFFFF"/>
+                </a:solidFill>
+                <a:latin typeface="Inter"/>
+              </a:rPr>
+              <a:t>STEP 1–2</a:t>
+            </a:r>
+          </a:p>
+        </p:txBody>
+      </p:sp>
+      <p:sp>
+        <p:nvSpPr>
+          <p:cNvPr id="4" name="TextBox 3"/>
+          <p:cNvSpPr txBox="1"/>
+          <p:nvPr/>
+        </p:nvSpPr>
+        <p:spPr>
+          <a:xfrm>
+            <a:off x="548640" y="1463040"/>
+            <a:ext cx="3383280" cy="1463040"/>
+          </a:xfrm>
+          <a:prstGeom prst="rect">
+            <a:avLst/>
+          </a:prstGeom>
+          <a:noFill/>
+        </p:spPr>
+        <p:txBody>
+          <a:bodyPr wrap="square" lIns="0" rIns="0" tIns="0" bIns="0" anchor="t"/>
+          <a:lstStyle/>
+          <a:p>
+            <a:pPr algn="l">
+              <a:lnSpc>
+                <a:spcPct val="105000"/>
+              </a:lnSpc>
+            </a:pPr>
+            <a:r>
+              <a:rPr sz="3000" b="1">
+                <a:solidFill>
+                  <a:srgbClr val="171717"/>
+                </a:solidFill>
+                <a:latin typeface="Inter"/>
+              </a:rPr>
+              <a:t>Start a new quote.</a:t>
+            </a:r>
+          </a:p>
+        </p:txBody>
+      </p:sp>
+      <p:sp>
+        <p:nvSpPr>
+          <p:cNvPr id="5" name="TextBox 4"/>
+          <p:cNvSpPr txBox="1"/>
+          <p:nvPr/>
+        </p:nvSpPr>
+        <p:spPr>
+          <a:xfrm>
+            <a:off x="548640" y="3108960"/>
+            <a:ext cx="3291840" cy="3566160"/>
+          </a:xfrm>
+          <a:prstGeom prst="rect">
+            <a:avLst/>
+          </a:prstGeom>
+          <a:noFill/>
+        </p:spPr>
+        <p:txBody>
+          <a:bodyPr wrap="square" lIns="0" rIns="0" tIns="0" bIns="0" anchor="t"/>
+          <a:lstStyle/>
+          <a:p>
+            <a:pPr algn="l">
+              <a:lnSpc>
+                <a:spcPct val="120000"/>
+              </a:lnSpc>
+            </a:pPr>
+            <a:r>
+              <a:rPr sz="2000" b="1">
                 <a:solidFill>
                   <a:srgbClr val="6B6B6B"/>
                 </a:solidFill>
                 <a:latin typeface="Inter"/>
               </a:rPr>
-              <a:t>→</a:t>
-            </a:r>
-          </a:p>
-        </p:txBody>
-      </p:sp>
-      <p:sp>
-        <p:nvSpPr>
-          <p:cNvPr id="8" name="Rounded Rectangle 7"/>
+              <a:t>1  </a:t>
+            </a:r>
+            <a:r>
+              <a:rPr sz="2000" b="0">
+                <a:solidFill>
+                  <a:srgbClr val="6B6B6B"/>
+                </a:solidFill>
+                <a:latin typeface="Inter"/>
+              </a:rPr>
+              <a:t>Click the </a:t>
+            </a:r>
+            <a:r>
+              <a:rPr sz="2000" b="1">
+                <a:solidFill>
+                  <a:srgbClr val="6B6B6B"/>
+                </a:solidFill>
+                <a:latin typeface="Inter"/>
+              </a:rPr>
+              <a:t>Quote</a:t>
+            </a:r>
+            <a:r>
+              <a:rPr sz="2000" b="0">
+                <a:solidFill>
+                  <a:srgbClr val="6B6B6B"/>
+                </a:solidFill>
+                <a:latin typeface="Inter"/>
+              </a:rPr>
+              <a:t> tab at the bottom.</a:t>
+            </a:r>
+          </a:p>
+          <a:p>
+            <a:pPr algn="l">
+              <a:lnSpc>
+                <a:spcPct val="120000"/>
+              </a:lnSpc>
+              <a:spcBef>
+                <a:spcPts val="1200"/>
+              </a:spcBef>
+            </a:pPr>
+            <a:r>
+              <a:rPr sz="2000" b="1">
+                <a:solidFill>
+                  <a:srgbClr val="6B6B6B"/>
+                </a:solidFill>
+                <a:latin typeface="Inter"/>
+              </a:rPr>
+              <a:t>2  </a:t>
+            </a:r>
+            <a:r>
+              <a:rPr sz="2000" b="0">
+                <a:solidFill>
+                  <a:srgbClr val="6B6B6B"/>
+                </a:solidFill>
+                <a:latin typeface="Inter"/>
+              </a:rPr>
+              <a:t>Click </a:t>
+            </a:r>
+            <a:r>
+              <a:rPr sz="2000" b="1">
+                <a:solidFill>
+                  <a:srgbClr val="6B6B6B"/>
+                </a:solidFill>
+                <a:latin typeface="Inter"/>
+              </a:rPr>
+              <a:t>Start new quote</a:t>
+            </a:r>
+            <a:r>
+              <a:rPr sz="2000" b="0">
+                <a:solidFill>
+                  <a:srgbClr val="6B6B6B"/>
+                </a:solidFill>
+                <a:latin typeface="Inter"/>
+              </a:rPr>
+              <a:t>.</a:t>
+            </a:r>
+          </a:p>
+          <a:p>
+            <a:pPr algn="l">
+              <a:lnSpc>
+                <a:spcPct val="120000"/>
+              </a:lnSpc>
+              <a:spcBef>
+                <a:spcPts val="1200"/>
+              </a:spcBef>
+            </a:pPr>
+            <a:r>
+              <a:rPr sz="2000" b="0">
+                <a:solidFill>
+                  <a:srgbClr val="6B6B6B"/>
+                </a:solidFill>
+                <a:latin typeface="Inter"/>
+              </a:rPr>
+              <a:t>It clears the old quote and sets the next quote number.</a:t>
+            </a:r>
+          </a:p>
+        </p:txBody>
+      </p:sp>
+      <p:pic>
+        <p:nvPicPr>
+          <p:cNvPr id="6" name="Picture 5" descr="quote-0-180-1320-720.png"/>
+          <p:cNvPicPr>
+            <a:picLocks noChangeAspect="1"/>
+          </p:cNvPicPr>
+          <p:nvPr/>
+        </p:nvPicPr>
+        <p:blipFill>
+          <a:blip r:embed="rId2"/>
+          <a:stretch>
+            <a:fillRect/>
+          </a:stretch>
+        </p:blipFill>
+        <p:spPr>
+          <a:xfrm>
+            <a:off x="4160520" y="777240"/>
+            <a:ext cx="7635240" cy="4164676"/>
+          </a:xfrm>
+          <a:prstGeom prst="rect">
+            <a:avLst/>
+          </a:prstGeom>
+        </p:spPr>
+      </p:pic>
+      <p:sp>
+        <p:nvSpPr>
+          <p:cNvPr id="7" name="Rounded Rectangle 6"/>
           <p:cNvSpPr/>
           <p:nvPr/>
         </p:nvSpPr>
         <p:spPr>
           <a:xfrm>
-            <a:off x="4434840" y="2103120"/>
-            <a:ext cx="3246120" cy="2743200"/>
+            <a:off x="4160520" y="777240"/>
+            <a:ext cx="7635240" cy="4164676"/>
           </a:xfrm>
           <a:prstGeom prst="roundRect">
             <a:avLst>
-              <a:gd name="adj" fmla="val 6666"/>
+              <a:gd name="adj" fmla="val 1317"/>
             </a:avLst>
           </a:prstGeom>
+          <a:noFill/>
+          <a:ln w="9525">
+            <a:solidFill>
+              <a:srgbClr val="DADCE0"/>
+            </a:solidFill>
+          </a:ln>
+          <a:effectLst/>
+        </p:spPr>
+        <p:style>
+          <a:lnRef idx="1">
+            <a:schemeClr val="accent1"/>
+          </a:lnRef>
+          <a:fillRef idx="3">
+            <a:schemeClr val="accent1"/>
+          </a:fillRef>
+          <a:effectRef idx="0">
+            <a:schemeClr val="accent1"/>
+          </a:effectRef>
+          <a:fontRef idx="minor">
+            <a:schemeClr val="lt1"/>
+          </a:fontRef>
+        </p:style>
+        <p:txBody>
+          <a:bodyPr rtlCol="0" anchor="ctr"/>
+          <a:lstStyle/>
+          <a:p>
+            <a:pPr algn="ctr"/>
+          </a:p>
+        </p:txBody>
+      </p:sp>
+      <p:sp>
+        <p:nvSpPr>
+          <p:cNvPr id="8" name="Oval 7"/>
+          <p:cNvSpPr/>
+          <p:nvPr/>
+        </p:nvSpPr>
+        <p:spPr>
+          <a:xfrm>
+            <a:off x="4623261" y="4652702"/>
+            <a:ext cx="597768" cy="318135"/>
+          </a:xfrm>
+          <a:prstGeom prst="ellipse">
+            <a:avLst/>
+          </a:prstGeom>
+          <a:noFill/>
+          <a:ln w="57150">
+            <a:solidFill>
+              <a:srgbClr val="E8382F"/>
+            </a:solidFill>
+          </a:ln>
+          <a:effectLst/>
+        </p:spPr>
+        <p:style>
+          <a:lnRef idx="1">
+            <a:schemeClr val="accent1"/>
+          </a:lnRef>
+          <a:fillRef idx="3">
+            <a:schemeClr val="accent1"/>
+          </a:fillRef>
+          <a:effectRef idx="0">
+            <a:schemeClr val="accent1"/>
+          </a:effectRef>
+          <a:fontRef idx="minor">
+            <a:schemeClr val="lt1"/>
+          </a:fontRef>
+        </p:style>
+        <p:txBody>
+          <a:bodyPr rtlCol="0" anchor="ctr"/>
+          <a:lstStyle/>
+          <a:p>
+            <a:pPr algn="ctr"/>
+          </a:p>
+        </p:txBody>
+      </p:sp>
+      <p:sp>
+        <p:nvSpPr>
+          <p:cNvPr id="9" name="Rounded Rectangle 8"/>
+          <p:cNvSpPr/>
+          <p:nvPr/>
+        </p:nvSpPr>
+        <p:spPr>
+          <a:xfrm>
+            <a:off x="4251959" y="4149782"/>
+            <a:ext cx="2468880" cy="420624"/>
+          </a:xfrm>
+          <a:prstGeom prst="roundRect">
+            <a:avLst>
+              <a:gd name="adj" fmla="val 50000"/>
+            </a:avLst>
+          </a:prstGeom>
           <a:solidFill>
-            <a:srgbClr val="F5F5F7"/>
+            <a:srgbClr val="E8382F"/>
           </a:solidFill>
           <a:ln>
             <a:noFill/>
@@ -5901,14 +4203,14 @@
       </p:sp>
       <p:sp>
         <p:nvSpPr>
-          <p:cNvPr id="9" name="TextBox 8"/>
+          <p:cNvPr id="10" name="TextBox 9"/>
           <p:cNvSpPr txBox="1"/>
           <p:nvPr/>
         </p:nvSpPr>
         <p:spPr>
           <a:xfrm>
-            <a:off x="4800600" y="2423160"/>
-            <a:ext cx="2560320" cy="640080"/>
+            <a:off x="4251959" y="4149782"/>
+            <a:ext cx="2468880" cy="420624"/>
           </a:xfrm>
           <a:prstGeom prst="rect">
             <a:avLst/>
@@ -5916,118 +4218,7 @@
           <a:noFill/>
         </p:spPr>
         <p:txBody>
-          <a:bodyPr wrap="square" lIns="0" rIns="0" tIns="0" bIns="0" anchor="t"/>
-          <a:lstStyle/>
-          <a:p>
-            <a:pPr algn="l">
-              <a:lnSpc>
-                <a:spcPct val="110000"/>
-              </a:lnSpc>
-            </a:pPr>
-            <a:r>
-              <a:rPr sz="4000" b="1">
-                <a:solidFill>
-                  <a:srgbClr val="0096CF"/>
-                </a:solidFill>
-                <a:latin typeface="Inter"/>
-              </a:rPr>
-              <a:t>2</a:t>
-            </a:r>
-          </a:p>
-        </p:txBody>
-      </p:sp>
-      <p:sp>
-        <p:nvSpPr>
-          <p:cNvPr id="10" name="TextBox 9"/>
-          <p:cNvSpPr txBox="1"/>
-          <p:nvPr/>
-        </p:nvSpPr>
-        <p:spPr>
-          <a:xfrm>
-            <a:off x="4800600" y="3291840"/>
-            <a:ext cx="2651760" cy="822960"/>
-          </a:xfrm>
-          <a:prstGeom prst="rect">
-            <a:avLst/>
-          </a:prstGeom>
-          <a:noFill/>
-        </p:spPr>
-        <p:txBody>
-          <a:bodyPr wrap="square" lIns="0" rIns="0" tIns="0" bIns="0" anchor="t"/>
-          <a:lstStyle/>
-          <a:p>
-            <a:pPr algn="l">
-              <a:lnSpc>
-                <a:spcPct val="110000"/>
-              </a:lnSpc>
-            </a:pPr>
-            <a:r>
-              <a:rPr sz="2200" b="1">
-                <a:solidFill>
-                  <a:srgbClr val="171717"/>
-                </a:solidFill>
-                <a:latin typeface="Inter"/>
-              </a:rPr>
-              <a:t>You click Make PDF</a:t>
-            </a:r>
-          </a:p>
-        </p:txBody>
-      </p:sp>
-      <p:sp>
-        <p:nvSpPr>
-          <p:cNvPr id="11" name="TextBox 10"/>
-          <p:cNvSpPr txBox="1"/>
-          <p:nvPr/>
-        </p:nvSpPr>
-        <p:spPr>
-          <a:xfrm>
-            <a:off x="4800600" y="4069080"/>
-            <a:ext cx="2651760" cy="640080"/>
-          </a:xfrm>
-          <a:prstGeom prst="rect">
-            <a:avLst/>
-          </a:prstGeom>
-          <a:noFill/>
-        </p:spPr>
-        <p:txBody>
-          <a:bodyPr wrap="square" lIns="0" rIns="0" tIns="0" bIns="0" anchor="t"/>
-          <a:lstStyle/>
-          <a:p>
-            <a:pPr algn="l">
-              <a:lnSpc>
-                <a:spcPct val="110000"/>
-              </a:lnSpc>
-            </a:pPr>
-            <a:r>
-              <a:rPr sz="1600" b="0">
-                <a:solidFill>
-                  <a:srgbClr val="6B6B6B"/>
-                </a:solidFill>
-                <a:latin typeface="Inter"/>
-              </a:rPr>
-              <a:t>One button</a:t>
-            </a:r>
-          </a:p>
-        </p:txBody>
-      </p:sp>
-      <p:sp>
-        <p:nvSpPr>
-          <p:cNvPr id="12" name="TextBox 11"/>
-          <p:cNvSpPr txBox="1"/>
-          <p:nvPr/>
-        </p:nvSpPr>
-        <p:spPr>
-          <a:xfrm>
-            <a:off x="7708392" y="3108960"/>
-            <a:ext cx="365760" cy="548640"/>
-          </a:xfrm>
-          <a:prstGeom prst="rect">
-            <a:avLst/>
-          </a:prstGeom>
-          <a:noFill/>
-        </p:spPr>
-        <p:txBody>
-          <a:bodyPr wrap="square" lIns="0" rIns="0" tIns="0" bIns="0" anchor="t"/>
+          <a:bodyPr wrap="square" lIns="0" rIns="0" tIns="0" bIns="0" anchor="ctr"/>
           <a:lstStyle/>
           <a:p>
             <a:pPr algn="ctr">
@@ -6036,35 +4227,79 @@
               </a:lnSpc>
             </a:pPr>
             <a:r>
-              <a:rPr sz="2800" b="1">
-                <a:solidFill>
-                  <a:srgbClr val="6B6B6B"/>
-                </a:solidFill>
-                <a:latin typeface="Inter"/>
-              </a:rPr>
-              <a:t>→</a:t>
-            </a:r>
-          </a:p>
-        </p:txBody>
-      </p:sp>
-      <p:sp>
-        <p:nvSpPr>
-          <p:cNvPr id="13" name="Rounded Rectangle 12"/>
+              <a:rPr sz="1600" b="1">
+                <a:solidFill>
+                  <a:srgbClr val="FFFFFF"/>
+                </a:solidFill>
+                <a:latin typeface="Inter"/>
+              </a:rPr>
+              <a:t>1   Quote tab</a:t>
+            </a:r>
+          </a:p>
+        </p:txBody>
+      </p:sp>
+      <p:sp>
+        <p:nvSpPr>
+          <p:cNvPr id="11" name="Oval 10"/>
           <p:cNvSpPr/>
           <p:nvPr/>
         </p:nvSpPr>
         <p:spPr>
           <a:xfrm>
-            <a:off x="8046720" y="2103120"/>
-            <a:ext cx="3246120" cy="2743200"/>
+            <a:off x="10060478" y="1650665"/>
+            <a:ext cx="1446068" cy="416467"/>
+          </a:xfrm>
+          <a:prstGeom prst="ellipse">
+            <a:avLst/>
+          </a:prstGeom>
+          <a:noFill/>
+          <a:ln w="57150">
+            <a:solidFill>
+              <a:srgbClr val="E8382F"/>
+            </a:solidFill>
+          </a:ln>
+          <a:effectLst/>
+        </p:spPr>
+        <p:style>
+          <a:lnRef idx="1">
+            <a:schemeClr val="accent1"/>
+          </a:lnRef>
+          <a:fillRef idx="3">
+            <a:schemeClr val="accent1"/>
+          </a:fillRef>
+          <a:effectRef idx="0">
+            <a:schemeClr val="accent1"/>
+          </a:effectRef>
+          <a:fontRef idx="minor">
+            <a:schemeClr val="lt1"/>
+          </a:fontRef>
+        </p:style>
+        <p:txBody>
+          <a:bodyPr rtlCol="0" anchor="ctr"/>
+          <a:lstStyle/>
+          <a:p>
+            <a:pPr algn="ctr"/>
+          </a:p>
+        </p:txBody>
+      </p:sp>
+      <p:sp>
+        <p:nvSpPr>
+          <p:cNvPr id="12" name="Rounded Rectangle 11"/>
+          <p:cNvSpPr/>
+          <p:nvPr/>
+        </p:nvSpPr>
+        <p:spPr>
+          <a:xfrm>
+            <a:off x="7481870" y="1648586"/>
+            <a:ext cx="2468880" cy="420624"/>
           </a:xfrm>
           <a:prstGeom prst="roundRect">
             <a:avLst>
-              <a:gd name="adj" fmla="val 6666"/>
+              <a:gd name="adj" fmla="val 50000"/>
             </a:avLst>
           </a:prstGeom>
           <a:solidFill>
-            <a:srgbClr val="F5F5F7"/>
+            <a:srgbClr val="E8382F"/>
           </a:solidFill>
           <a:ln>
             <a:noFill/>
@@ -6095,14 +4330,14 @@
       </p:sp>
       <p:sp>
         <p:nvSpPr>
-          <p:cNvPr id="14" name="TextBox 13"/>
+          <p:cNvPr id="13" name="TextBox 12"/>
           <p:cNvSpPr txBox="1"/>
           <p:nvPr/>
         </p:nvSpPr>
         <p:spPr>
           <a:xfrm>
-            <a:off x="8412480" y="2423160"/>
-            <a:ext cx="2560320" cy="640080"/>
+            <a:off x="7481870" y="1648586"/>
+            <a:ext cx="2468880" cy="420624"/>
           </a:xfrm>
           <a:prstGeom prst="rect">
             <a:avLst/>
@@ -6110,142 +4345,22 @@
           <a:noFill/>
         </p:spPr>
         <p:txBody>
-          <a:bodyPr wrap="square" lIns="0" rIns="0" tIns="0" bIns="0" anchor="t"/>
-          <a:lstStyle/>
-          <a:p>
-            <a:pPr algn="l">
+          <a:bodyPr wrap="square" lIns="0" rIns="0" tIns="0" bIns="0" anchor="ctr"/>
+          <a:lstStyle/>
+          <a:p>
+            <a:pPr algn="ctr">
               <a:lnSpc>
                 <a:spcPct val="110000"/>
               </a:lnSpc>
             </a:pPr>
             <a:r>
-              <a:rPr sz="4000" b="1">
-                <a:solidFill>
-                  <a:srgbClr val="0096CF"/>
-                </a:solidFill>
-                <a:latin typeface="Inter"/>
-              </a:rPr>
-              <a:t>3</a:t>
-            </a:r>
-          </a:p>
-        </p:txBody>
-      </p:sp>
-      <p:sp>
-        <p:nvSpPr>
-          <p:cNvPr id="15" name="TextBox 14"/>
-          <p:cNvSpPr txBox="1"/>
-          <p:nvPr/>
-        </p:nvSpPr>
-        <p:spPr>
-          <a:xfrm>
-            <a:off x="8412480" y="3291840"/>
-            <a:ext cx="2651760" cy="822960"/>
-          </a:xfrm>
-          <a:prstGeom prst="rect">
-            <a:avLst/>
-          </a:prstGeom>
-          <a:noFill/>
-        </p:spPr>
-        <p:txBody>
-          <a:bodyPr wrap="square" lIns="0" rIns="0" tIns="0" bIns="0" anchor="t"/>
-          <a:lstStyle/>
-          <a:p>
-            <a:pPr algn="l">
-              <a:lnSpc>
-                <a:spcPct val="110000"/>
-              </a:lnSpc>
-            </a:pPr>
-            <a:r>
-              <a:rPr sz="2200" b="1">
-                <a:solidFill>
-                  <a:srgbClr val="171717"/>
-                </a:solidFill>
-                <a:latin typeface="Inter"/>
-              </a:rPr>
-              <a:t>You get the quote</a:t>
-            </a:r>
-          </a:p>
-        </p:txBody>
-      </p:sp>
-      <p:sp>
-        <p:nvSpPr>
-          <p:cNvPr id="16" name="TextBox 15"/>
-          <p:cNvSpPr txBox="1"/>
-          <p:nvPr/>
-        </p:nvSpPr>
-        <p:spPr>
-          <a:xfrm>
-            <a:off x="8412480" y="4069080"/>
-            <a:ext cx="2651760" cy="640080"/>
-          </a:xfrm>
-          <a:prstGeom prst="rect">
-            <a:avLst/>
-          </a:prstGeom>
-          <a:noFill/>
-        </p:spPr>
-        <p:txBody>
-          <a:bodyPr wrap="square" lIns="0" rIns="0" tIns="0" bIns="0" anchor="t"/>
-          <a:lstStyle/>
-          <a:p>
-            <a:pPr algn="l">
-              <a:lnSpc>
-                <a:spcPct val="110000"/>
-              </a:lnSpc>
-            </a:pPr>
-            <a:r>
-              <a:rPr sz="1600" b="0">
-                <a:solidFill>
-                  <a:srgbClr val="6B6B6B"/>
-                </a:solidFill>
-                <a:latin typeface="Inter"/>
-              </a:rPr>
-              <a:t>A clean one-page PDF, saved in Drive</a:t>
-            </a:r>
-          </a:p>
-        </p:txBody>
-      </p:sp>
-      <p:sp>
-        <p:nvSpPr>
-          <p:cNvPr id="17" name="TextBox 16"/>
-          <p:cNvSpPr txBox="1"/>
-          <p:nvPr/>
-        </p:nvSpPr>
-        <p:spPr>
-          <a:xfrm>
-            <a:off x="822960" y="5349240"/>
-            <a:ext cx="10515600" cy="548640"/>
-          </a:xfrm>
-          <a:prstGeom prst="rect">
-            <a:avLst/>
-          </a:prstGeom>
-          <a:noFill/>
-        </p:spPr>
-        <p:txBody>
-          <a:bodyPr wrap="square" lIns="0" rIns="0" tIns="0" bIns="0" anchor="t"/>
-          <a:lstStyle/>
-          <a:p>
-            <a:pPr algn="l">
-              <a:lnSpc>
-                <a:spcPct val="110000"/>
-              </a:lnSpc>
-            </a:pPr>
-            <a:r>
-              <a:rPr sz="1800" b="1">
-                <a:solidFill>
-                  <a:srgbClr val="6B6B6B"/>
-                </a:solidFill>
-                <a:latin typeface="Inter"/>
-              </a:rPr>
-              <a:t>No math. No line items. </a:t>
-            </a:r>
-            <a:r>
-              <a:rPr sz="1800" b="0">
-                <a:solidFill>
-                  <a:srgbClr val="6B6B6B"/>
-                </a:solidFill>
-                <a:latin typeface="Inter"/>
-              </a:rPr>
-              <a:t>Prices come from the Packages tab.</a:t>
+              <a:rPr sz="1600" b="1">
+                <a:solidFill>
+                  <a:srgbClr val="FFFFFF"/>
+                </a:solidFill>
+                <a:latin typeface="Inter"/>
+              </a:rPr>
+              <a:t>2   Start new quote</a:t>
             </a:r>
           </a:p>
         </p:txBody>
@@ -6285,7 +4400,7 @@
         <p:spPr>
           <a:xfrm>
             <a:off x="548640" y="777240"/>
-            <a:ext cx="1005840" cy="457200"/>
+            <a:ext cx="1243584" cy="457200"/>
           </a:xfrm>
           <a:prstGeom prst="roundRect">
             <a:avLst>
@@ -6331,7 +4446,7 @@
         <p:spPr>
           <a:xfrm>
             <a:off x="548640" y="777240"/>
-            <a:ext cx="1005840" cy="457200"/>
+            <a:ext cx="1243584" cy="457200"/>
           </a:xfrm>
           <a:prstGeom prst="rect">
             <a:avLst/>
@@ -6354,7 +4469,7 @@
                 </a:solidFill>
                 <a:latin typeface="Inter"/>
               </a:rPr>
-              <a:t>STEP 1</a:t>
+              <a:t>STEP 3–4</a:t>
             </a:r>
           </a:p>
         </p:txBody>
@@ -6391,7 +4506,7 @@
                 </a:solidFill>
                 <a:latin typeface="Inter"/>
               </a:rPr>
-              <a:t>Open the sheet. Click the Quote tab.</a:t>
+              <a:t>Fill it in.</a:t>
             </a:r>
           </a:p>
         </p:txBody>
@@ -6422,13 +4537,22 @@
               </a:lnSpc>
             </a:pPr>
             <a:r>
+              <a:rPr sz="2000" b="1">
+                <a:solidFill>
+                  <a:srgbClr val="6B6B6B"/>
+                </a:solidFill>
+                <a:latin typeface="Inter"/>
+              </a:rPr>
+              <a:t>3  </a:t>
+            </a:r>
+            <a:r>
               <a:rPr sz="2000" b="0">
                 <a:solidFill>
                   <a:srgbClr val="6B6B6B"/>
                 </a:solidFill>
                 <a:latin typeface="Inter"/>
               </a:rPr>
-              <a:t>Open </a:t>
+              <a:t>Pick the </a:t>
             </a:r>
             <a:r>
               <a:rPr sz="2000" b="1">
@@ -6437,7 +4561,7 @@
                 </a:solidFill>
                 <a:latin typeface="Inter"/>
               </a:rPr>
-              <a:t>Helix Package Quotes</a:t>
+              <a:t>package</a:t>
             </a:r>
             <a:r>
               <a:rPr sz="2000" b="0">
@@ -6446,7 +4570,7 @@
                 </a:solidFill>
                 <a:latin typeface="Inter"/>
               </a:rPr>
-              <a:t> in Google Drive.</a:t>
+              <a:t> from the list.</a:t>
             </a:r>
           </a:p>
           <a:p>
@@ -6459,13 +4583,22 @@
               </a:spcBef>
             </a:pPr>
             <a:r>
+              <a:rPr sz="2000" b="1">
+                <a:solidFill>
+                  <a:srgbClr val="6B6B6B"/>
+                </a:solidFill>
+                <a:latin typeface="Inter"/>
+              </a:rPr>
+              <a:t>4  </a:t>
+            </a:r>
+            <a:r>
               <a:rPr sz="2000" b="0">
                 <a:solidFill>
                   <a:srgbClr val="6B6B6B"/>
                 </a:solidFill>
                 <a:latin typeface="Inter"/>
               </a:rPr>
-              <a:t>The tabs are at the </a:t>
+              <a:t>Type in the </a:t>
             </a:r>
             <a:r>
               <a:rPr sz="2000" b="1">
@@ -6474,7 +4607,7 @@
                 </a:solidFill>
                 <a:latin typeface="Inter"/>
               </a:rPr>
-              <a:t>bottom</a:t>
+              <a:t>blue cells</a:t>
             </a:r>
             <a:r>
               <a:rPr sz="2000" b="0">
@@ -6483,14 +4616,33 @@
                 </a:solidFill>
                 <a:latin typeface="Inter"/>
               </a:rPr>
-              <a:t> of the screen.</a:t>
+              <a:t>: client, date, days.</a:t>
+            </a:r>
+          </a:p>
+          <a:p>
+            <a:pPr algn="l">
+              <a:lnSpc>
+                <a:spcPct val="120000"/>
+              </a:lnSpc>
+              <a:spcBef>
+                <a:spcPts val="1200"/>
+              </a:spcBef>
+            </a:pPr>
+            <a:r>
+              <a:rPr sz="2000" b="0">
+                <a:solidFill>
+                  <a:srgbClr val="6B6B6B"/>
+                </a:solidFill>
+                <a:latin typeface="Inter"/>
+              </a:rPr>
+              <a:t>The gray words next to each cell say what goes there.</a:t>
             </a:r>
           </a:p>
         </p:txBody>
       </p:sp>
       <p:pic>
         <p:nvPicPr>
-          <p:cNvPr id="6" name="Picture 5" descr="quote-0-340-800-560.png"/>
+          <p:cNvPr id="6" name="Picture 5" descr="quote-empty-0-180-800-560.png"/>
           <p:cNvPicPr>
             <a:picLocks noChangeAspect="1"/>
           </p:cNvPicPr>
@@ -6566,8 +4718,8 @@
         </p:nvSpPr>
         <p:spPr>
           <a:xfrm>
-            <a:off x="4924044" y="5644705"/>
-            <a:ext cx="986317" cy="524922"/>
+            <a:off x="6619604" y="1316478"/>
+            <a:ext cx="3340417" cy="477202"/>
           </a:xfrm>
           <a:prstGeom prst="ellipse">
             <a:avLst/>
@@ -6610,7 +4762,7 @@
         </p:nvSpPr>
         <p:spPr>
           <a:xfrm>
-            <a:off x="4251959" y="5141785"/>
+            <a:off x="9235440" y="1344768"/>
             <a:ext cx="2468880" cy="420624"/>
           </a:xfrm>
           <a:prstGeom prst="roundRect">
@@ -6656,7 +4808,7 @@
         </p:nvSpPr>
         <p:spPr>
           <a:xfrm>
-            <a:off x="4251959" y="5141785"/>
+            <a:off x="9235440" y="1344768"/>
             <a:ext cx="2468880" cy="420624"/>
           </a:xfrm>
           <a:prstGeom prst="rect">
@@ -6680,7 +4832,178 @@
                 </a:solidFill>
                 <a:latin typeface="Inter"/>
               </a:rPr>
-              <a:t>Click here</a:t>
+              <a:t>3   Pick from the list</a:t>
+            </a:r>
+          </a:p>
+        </p:txBody>
+      </p:sp>
+      <p:sp>
+        <p:nvSpPr>
+          <p:cNvPr id="11" name="Oval 10"/>
+          <p:cNvSpPr/>
+          <p:nvPr/>
+        </p:nvSpPr>
+        <p:spPr>
+          <a:xfrm>
+            <a:off x="6619604" y="1602800"/>
+            <a:ext cx="3340417" cy="477202"/>
+          </a:xfrm>
+          <a:prstGeom prst="ellipse">
+            <a:avLst/>
+          </a:prstGeom>
+          <a:noFill/>
+          <a:ln w="57150">
+            <a:solidFill>
+              <a:srgbClr val="E8382F"/>
+            </a:solidFill>
+          </a:ln>
+          <a:effectLst/>
+        </p:spPr>
+        <p:style>
+          <a:lnRef idx="1">
+            <a:schemeClr val="accent1"/>
+          </a:lnRef>
+          <a:fillRef idx="3">
+            <a:schemeClr val="accent1"/>
+          </a:fillRef>
+          <a:effectRef idx="0">
+            <a:schemeClr val="accent1"/>
+          </a:effectRef>
+          <a:fontRef idx="minor">
+            <a:schemeClr val="lt1"/>
+          </a:fontRef>
+        </p:style>
+        <p:txBody>
+          <a:bodyPr rtlCol="0" anchor="ctr"/>
+          <a:lstStyle/>
+          <a:p>
+            <a:pPr algn="ctr"/>
+          </a:p>
+        </p:txBody>
+      </p:sp>
+      <p:sp>
+        <p:nvSpPr>
+          <p:cNvPr id="12" name="Oval 11"/>
+          <p:cNvSpPr/>
+          <p:nvPr/>
+        </p:nvSpPr>
+        <p:spPr>
+          <a:xfrm>
+            <a:off x="6619604" y="1889121"/>
+            <a:ext cx="3340417" cy="477202"/>
+          </a:xfrm>
+          <a:prstGeom prst="ellipse">
+            <a:avLst/>
+          </a:prstGeom>
+          <a:noFill/>
+          <a:ln w="57150">
+            <a:solidFill>
+              <a:srgbClr val="E8382F"/>
+            </a:solidFill>
+          </a:ln>
+          <a:effectLst/>
+        </p:spPr>
+        <p:style>
+          <a:lnRef idx="1">
+            <a:schemeClr val="accent1"/>
+          </a:lnRef>
+          <a:fillRef idx="3">
+            <a:schemeClr val="accent1"/>
+          </a:fillRef>
+          <a:effectRef idx="0">
+            <a:schemeClr val="accent1"/>
+          </a:effectRef>
+          <a:fontRef idx="minor">
+            <a:schemeClr val="lt1"/>
+          </a:fontRef>
+        </p:style>
+        <p:txBody>
+          <a:bodyPr rtlCol="0" anchor="ctr"/>
+          <a:lstStyle/>
+          <a:p>
+            <a:pPr algn="ctr"/>
+          </a:p>
+        </p:txBody>
+      </p:sp>
+      <p:sp>
+        <p:nvSpPr>
+          <p:cNvPr id="13" name="Rounded Rectangle 12"/>
+          <p:cNvSpPr/>
+          <p:nvPr/>
+        </p:nvSpPr>
+        <p:spPr>
+          <a:xfrm>
+            <a:off x="9235440" y="1917411"/>
+            <a:ext cx="2468880" cy="420624"/>
+          </a:xfrm>
+          <a:prstGeom prst="roundRect">
+            <a:avLst>
+              <a:gd name="adj" fmla="val 50000"/>
+            </a:avLst>
+          </a:prstGeom>
+          <a:solidFill>
+            <a:srgbClr val="E8382F"/>
+          </a:solidFill>
+          <a:ln>
+            <a:noFill/>
+          </a:ln>
+          <a:effectLst/>
+        </p:spPr>
+        <p:style>
+          <a:lnRef idx="1">
+            <a:schemeClr val="accent1"/>
+          </a:lnRef>
+          <a:fillRef idx="3">
+            <a:schemeClr val="accent1"/>
+          </a:fillRef>
+          <a:effectRef idx="0">
+            <a:schemeClr val="accent1"/>
+          </a:effectRef>
+          <a:fontRef idx="minor">
+            <a:schemeClr val="lt1"/>
+          </a:fontRef>
+        </p:style>
+        <p:txBody>
+          <a:bodyPr rtlCol="0" anchor="ctr"/>
+          <a:lstStyle/>
+          <a:p>
+            <a:pPr algn="ctr"/>
+          </a:p>
+        </p:txBody>
+      </p:sp>
+      <p:sp>
+        <p:nvSpPr>
+          <p:cNvPr id="14" name="TextBox 13"/>
+          <p:cNvSpPr txBox="1"/>
+          <p:nvPr/>
+        </p:nvSpPr>
+        <p:spPr>
+          <a:xfrm>
+            <a:off x="9235440" y="1917411"/>
+            <a:ext cx="2468880" cy="420624"/>
+          </a:xfrm>
+          <a:prstGeom prst="rect">
+            <a:avLst/>
+          </a:prstGeom>
+          <a:noFill/>
+        </p:spPr>
+        <p:txBody>
+          <a:bodyPr wrap="square" lIns="0" rIns="0" tIns="0" bIns="0" anchor="ctr"/>
+          <a:lstStyle/>
+          <a:p>
+            <a:pPr algn="ctr">
+              <a:lnSpc>
+                <a:spcPct val="110000"/>
+              </a:lnSpc>
+            </a:pPr>
+            <a:r>
+              <a:rPr sz="1600" b="1">
+                <a:solidFill>
+                  <a:srgbClr val="FFFFFF"/>
+                </a:solidFill>
+                <a:latin typeface="Inter"/>
+              </a:rPr>
+              <a:t>4   Type in blue cells</a:t>
             </a:r>
           </a:p>
         </p:txBody>
@@ -6720,7 +5043,7 @@
         <p:spPr>
           <a:xfrm>
             <a:off x="548640" y="777240"/>
-            <a:ext cx="1005840" cy="457200"/>
+            <a:ext cx="1243584" cy="457200"/>
           </a:xfrm>
           <a:prstGeom prst="roundRect">
             <a:avLst>
@@ -6766,7 +5089,7 @@
         <p:spPr>
           <a:xfrm>
             <a:off x="548640" y="777240"/>
-            <a:ext cx="1005840" cy="457200"/>
+            <a:ext cx="1243584" cy="457200"/>
           </a:xfrm>
           <a:prstGeom prst="rect">
             <a:avLst/>
@@ -6789,7 +5112,7 @@
                 </a:solidFill>
                 <a:latin typeface="Inter"/>
               </a:rPr>
-              <a:t>STEP 2</a:t>
+              <a:t>STEP 5–6</a:t>
             </a:r>
           </a:p>
         </p:txBody>
@@ -6826,7 +5149,7 @@
                 </a:solidFill>
                 <a:latin typeface="Inter"/>
               </a:rPr>
-              <a:t>Click Start new quote.</a:t>
+              <a:t>Make the PDF.</a:t>
             </a:r>
           </a:p>
         </p:txBody>
@@ -6857,13 +5180,40 @@
               </a:lnSpc>
             </a:pPr>
             <a:r>
+              <a:rPr sz="2000" b="1">
+                <a:solidFill>
+                  <a:srgbClr val="6B6B6B"/>
+                </a:solidFill>
+                <a:latin typeface="Inter"/>
+              </a:rPr>
+              <a:t>5  </a:t>
+            </a:r>
+            <a:r>
               <a:rPr sz="2000" b="0">
                 <a:solidFill>
                   <a:srgbClr val="6B6B6B"/>
                 </a:solidFill>
                 <a:latin typeface="Inter"/>
               </a:rPr>
-              <a:t>It clears the old client and date.</a:t>
+              <a:t>Click </a:t>
+            </a:r>
+            <a:r>
+              <a:rPr sz="2000" b="1">
+                <a:solidFill>
+                  <a:srgbClr val="6B6B6B"/>
+                </a:solidFill>
+                <a:latin typeface="Inter"/>
+              </a:rPr>
+              <a:t>Make PDF</a:t>
+            </a:r>
+            <a:r>
+              <a:rPr sz="2000" b="0">
+                <a:solidFill>
+                  <a:srgbClr val="6B6B6B"/>
+                </a:solidFill>
+                <a:latin typeface="Inter"/>
+              </a:rPr>
+              <a:t>. Wait a few seconds.</a:t>
             </a:r>
           </a:p>
           <a:p>
@@ -6876,13 +5226,22 @@
               </a:spcBef>
             </a:pPr>
             <a:r>
+              <a:rPr sz="2000" b="1">
+                <a:solidFill>
+                  <a:srgbClr val="6B6B6B"/>
+                </a:solidFill>
+                <a:latin typeface="Inter"/>
+              </a:rPr>
+              <a:t>6  </a:t>
+            </a:r>
+            <a:r>
               <a:rPr sz="2000" b="0">
                 <a:solidFill>
                   <a:srgbClr val="6B6B6B"/>
                 </a:solidFill>
                 <a:latin typeface="Inter"/>
               </a:rPr>
-              <a:t>The quote number goes up by one </a:t>
+              <a:t>Click </a:t>
             </a:r>
             <a:r>
               <a:rPr sz="2000" b="1">
@@ -6891,7 +5250,44 @@
                 </a:solidFill>
                 <a:latin typeface="Inter"/>
               </a:rPr>
-              <a:t>on its own</a:t>
+              <a:t>Open PDF</a:t>
+            </a:r>
+            <a:r>
+              <a:rPr sz="2000" b="0">
+                <a:solidFill>
+                  <a:srgbClr val="6B6B6B"/>
+                </a:solidFill>
+                <a:latin typeface="Inter"/>
+              </a:rPr>
+              <a:t>. Send it to the client.</a:t>
+            </a:r>
+          </a:p>
+          <a:p>
+            <a:pPr algn="l">
+              <a:lnSpc>
+                <a:spcPct val="120000"/>
+              </a:lnSpc>
+              <a:spcBef>
+                <a:spcPts val="1200"/>
+              </a:spcBef>
+            </a:pPr>
+            <a:r>
+              <a:rPr sz="2000" b="0">
+                <a:solidFill>
+                  <a:srgbClr val="6B6B6B"/>
+                </a:solidFill>
+                <a:latin typeface="Inter"/>
+              </a:rPr>
+              <a:t>Need to change a word? Click </a:t>
+            </a:r>
+            <a:r>
+              <a:rPr sz="2000" b="1">
+                <a:solidFill>
+                  <a:srgbClr val="6B6B6B"/>
+                </a:solidFill>
+                <a:latin typeface="Inter"/>
+              </a:rPr>
+              <a:t>Edit as Google Doc</a:t>
             </a:r>
             <a:r>
               <a:rPr sz="2000" b="0">
@@ -6907,7 +5303,7 @@
       </p:sp>
       <p:pic>
         <p:nvPicPr>
-          <p:cNvPr id="6" name="Picture 5" descr="quote-560-180-760-540.png"/>
+          <p:cNvPr id="6" name="Picture 5" descr="done-380-160-960-560.png"/>
           <p:cNvPicPr>
             <a:picLocks noChangeAspect="1"/>
           </p:cNvPicPr>
@@ -6922,7 +5318,7 @@
         <p:spPr>
           <a:xfrm>
             <a:off x="4160520" y="777240"/>
-            <a:ext cx="7592906" cy="5394959"/>
+            <a:ext cx="7635240" cy="4453890"/>
           </a:xfrm>
           <a:prstGeom prst="rect">
             <a:avLst/>
@@ -6938,11 +5334,11 @@
         <p:spPr>
           <a:xfrm>
             <a:off x="4160520" y="777240"/>
-            <a:ext cx="7592906" cy="5394959"/>
+            <a:ext cx="7635240" cy="4453890"/>
           </a:xfrm>
           <a:prstGeom prst="roundRect">
             <a:avLst>
-              <a:gd name="adj" fmla="val 1016"/>
+              <a:gd name="adj" fmla="val 1231"/>
             </a:avLst>
           </a:prstGeom>
           <a:noFill/>
@@ -6983,8 +5379,8 @@
         </p:nvSpPr>
         <p:spPr>
           <a:xfrm>
-            <a:off x="8756226" y="2285830"/>
-            <a:ext cx="2497666" cy="719328"/>
+            <a:off x="9250680" y="1397603"/>
+            <a:ext cx="1988343" cy="572643"/>
           </a:xfrm>
           <a:prstGeom prst="ellipse">
             <a:avLst/>
@@ -7027,7 +5423,7 @@
         </p:nvSpPr>
         <p:spPr>
           <a:xfrm>
-            <a:off x="6177618" y="2435182"/>
+            <a:off x="9010411" y="894683"/>
             <a:ext cx="2468880" cy="420624"/>
           </a:xfrm>
           <a:prstGeom prst="roundRect">
@@ -7073,7 +5469,7 @@
         </p:nvSpPr>
         <p:spPr>
           <a:xfrm>
-            <a:off x="6177618" y="2435182"/>
+            <a:off x="9010411" y="894683"/>
             <a:ext cx="2468880" cy="420624"/>
           </a:xfrm>
           <a:prstGeom prst="rect">
@@ -7097,7 +5493,134 @@
                 </a:solidFill>
                 <a:latin typeface="Inter"/>
               </a:rPr>
-              <a:t>Click here</a:t>
+              <a:t>5   Make PDF</a:t>
+            </a:r>
+          </a:p>
+        </p:txBody>
+      </p:sp>
+      <p:sp>
+        <p:nvSpPr>
+          <p:cNvPr id="11" name="Oval 10"/>
+          <p:cNvSpPr/>
+          <p:nvPr/>
+        </p:nvSpPr>
+        <p:spPr>
+          <a:xfrm>
+            <a:off x="5751195" y="2952488"/>
+            <a:ext cx="722762" cy="294274"/>
+          </a:xfrm>
+          <a:prstGeom prst="ellipse">
+            <a:avLst/>
+          </a:prstGeom>
+          <a:noFill/>
+          <a:ln w="57150">
+            <a:solidFill>
+              <a:srgbClr val="E8382F"/>
+            </a:solidFill>
+          </a:ln>
+          <a:effectLst/>
+        </p:spPr>
+        <p:style>
+          <a:lnRef idx="1">
+            <a:schemeClr val="accent1"/>
+          </a:lnRef>
+          <a:fillRef idx="3">
+            <a:schemeClr val="accent1"/>
+          </a:fillRef>
+          <a:effectRef idx="0">
+            <a:schemeClr val="accent1"/>
+          </a:effectRef>
+          <a:fontRef idx="minor">
+            <a:schemeClr val="lt1"/>
+          </a:fontRef>
+        </p:style>
+        <p:txBody>
+          <a:bodyPr rtlCol="0" anchor="ctr"/>
+          <a:lstStyle/>
+          <a:p>
+            <a:pPr algn="ctr"/>
+          </a:p>
+        </p:txBody>
+      </p:sp>
+      <p:sp>
+        <p:nvSpPr>
+          <p:cNvPr id="12" name="Rounded Rectangle 11"/>
+          <p:cNvSpPr/>
+          <p:nvPr/>
+        </p:nvSpPr>
+        <p:spPr>
+          <a:xfrm>
+            <a:off x="4878136" y="3319914"/>
+            <a:ext cx="2468880" cy="420624"/>
+          </a:xfrm>
+          <a:prstGeom prst="roundRect">
+            <a:avLst>
+              <a:gd name="adj" fmla="val 50000"/>
+            </a:avLst>
+          </a:prstGeom>
+          <a:solidFill>
+            <a:srgbClr val="E8382F"/>
+          </a:solidFill>
+          <a:ln>
+            <a:noFill/>
+          </a:ln>
+          <a:effectLst/>
+        </p:spPr>
+        <p:style>
+          <a:lnRef idx="1">
+            <a:schemeClr val="accent1"/>
+          </a:lnRef>
+          <a:fillRef idx="3">
+            <a:schemeClr val="accent1"/>
+          </a:fillRef>
+          <a:effectRef idx="0">
+            <a:schemeClr val="accent1"/>
+          </a:effectRef>
+          <a:fontRef idx="minor">
+            <a:schemeClr val="lt1"/>
+          </a:fontRef>
+        </p:style>
+        <p:txBody>
+          <a:bodyPr rtlCol="0" anchor="ctr"/>
+          <a:lstStyle/>
+          <a:p>
+            <a:pPr algn="ctr"/>
+          </a:p>
+        </p:txBody>
+      </p:sp>
+      <p:sp>
+        <p:nvSpPr>
+          <p:cNvPr id="13" name="TextBox 12"/>
+          <p:cNvSpPr txBox="1"/>
+          <p:nvPr/>
+        </p:nvSpPr>
+        <p:spPr>
+          <a:xfrm>
+            <a:off x="4878136" y="3319914"/>
+            <a:ext cx="2468880" cy="420624"/>
+          </a:xfrm>
+          <a:prstGeom prst="rect">
+            <a:avLst/>
+          </a:prstGeom>
+          <a:noFill/>
+        </p:spPr>
+        <p:txBody>
+          <a:bodyPr wrap="square" lIns="0" rIns="0" tIns="0" bIns="0" anchor="ctr"/>
+          <a:lstStyle/>
+          <a:p>
+            <a:pPr algn="ctr">
+              <a:lnSpc>
+                <a:spcPct val="110000"/>
+              </a:lnSpc>
+            </a:pPr>
+            <a:r>
+              <a:rPr sz="1600" b="1">
+                <a:solidFill>
+                  <a:srgbClr val="FFFFFF"/>
+                </a:solidFill>
+                <a:latin typeface="Inter"/>
+              </a:rPr>
+              <a:t>6   Open PDF</a:t>
             </a:r>
           </a:p>
         </p:txBody>
@@ -7130,97 +5653,14 @@
       <p:grpSpPr/>
       <p:sp>
         <p:nvSpPr>
-          <p:cNvPr id="2" name="Rounded Rectangle 1"/>
-          <p:cNvSpPr/>
+          <p:cNvPr id="2" name="TextBox 1"/>
+          <p:cNvSpPr txBox="1"/>
           <p:nvPr/>
         </p:nvSpPr>
         <p:spPr>
           <a:xfrm>
             <a:off x="548640" y="777240"/>
-            <a:ext cx="1005840" cy="457200"/>
-          </a:xfrm>
-          <a:prstGeom prst="roundRect">
-            <a:avLst>
-              <a:gd name="adj" fmla="val 50000"/>
-            </a:avLst>
-          </a:prstGeom>
-          <a:solidFill>
-            <a:srgbClr val="0096CF"/>
-          </a:solidFill>
-          <a:ln>
-            <a:noFill/>
-          </a:ln>
-          <a:effectLst/>
-        </p:spPr>
-        <p:style>
-          <a:lnRef idx="1">
-            <a:schemeClr val="accent1"/>
-          </a:lnRef>
-          <a:fillRef idx="3">
-            <a:schemeClr val="accent1"/>
-          </a:fillRef>
-          <a:effectRef idx="0">
-            <a:schemeClr val="accent1"/>
-          </a:effectRef>
-          <a:fontRef idx="minor">
-            <a:schemeClr val="lt1"/>
-          </a:fontRef>
-        </p:style>
-        <p:txBody>
-          <a:bodyPr rtlCol="0" anchor="ctr"/>
-          <a:lstStyle/>
-          <a:p>
-            <a:pPr algn="ctr"/>
-          </a:p>
-        </p:txBody>
-      </p:sp>
-      <p:sp>
-        <p:nvSpPr>
-          <p:cNvPr id="3" name="TextBox 2"/>
-          <p:cNvSpPr txBox="1"/>
-          <p:nvPr/>
-        </p:nvSpPr>
-        <p:spPr>
-          <a:xfrm>
-            <a:off x="548640" y="777240"/>
-            <a:ext cx="1005840" cy="457200"/>
-          </a:xfrm>
-          <a:prstGeom prst="rect">
-            <a:avLst/>
-          </a:prstGeom>
-          <a:noFill/>
-        </p:spPr>
-        <p:txBody>
-          <a:bodyPr wrap="square" lIns="0" rIns="0" tIns="0" bIns="0" anchor="ctr"/>
-          <a:lstStyle/>
-          <a:p>
-            <a:pPr algn="ctr">
-              <a:lnSpc>
-                <a:spcPct val="110000"/>
-              </a:lnSpc>
-            </a:pPr>
-            <a:r>
-              <a:rPr sz="1400" b="1">
-                <a:solidFill>
-                  <a:srgbClr val="FFFFFF"/>
-                </a:solidFill>
-                <a:latin typeface="Inter"/>
-              </a:rPr>
-              <a:t>STEP 3</a:t>
-            </a:r>
-          </a:p>
-        </p:txBody>
-      </p:sp>
-      <p:sp>
-        <p:nvSpPr>
-          <p:cNvPr id="4" name="TextBox 3"/>
-          <p:cNvSpPr txBox="1"/>
-          <p:nvPr/>
-        </p:nvSpPr>
-        <p:spPr>
-          <a:xfrm>
-            <a:off x="548640" y="1463040"/>
-            <a:ext cx="3383280" cy="1463040"/>
+            <a:ext cx="4206240" cy="1097280"/>
           </a:xfrm>
           <a:prstGeom prst="rect">
             <a:avLst/>
@@ -7243,21 +5683,21 @@
                 </a:solidFill>
                 <a:latin typeface="Inter"/>
               </a:rPr>
-              <a:t>Pick the package.</a:t>
-            </a:r>
-          </a:p>
-        </p:txBody>
-      </p:sp>
-      <p:sp>
-        <p:nvSpPr>
-          <p:cNvPr id="5" name="TextBox 4"/>
+              <a:t>That’s it. This is the quote.</a:t>
+            </a:r>
+          </a:p>
+        </p:txBody>
+      </p:sp>
+      <p:sp>
+        <p:nvSpPr>
+          <p:cNvPr id="3" name="TextBox 2"/>
           <p:cNvSpPr txBox="1"/>
           <p:nvPr/>
         </p:nvSpPr>
         <p:spPr>
           <a:xfrm>
-            <a:off x="548640" y="3108960"/>
-            <a:ext cx="3291840" cy="3566160"/>
+            <a:off x="548640" y="2194560"/>
+            <a:ext cx="4206240" cy="3657600"/>
           </a:xfrm>
           <a:prstGeom prst="rect">
             <a:avLst/>
@@ -7280,25 +5720,7 @@
                 </a:solidFill>
                 <a:latin typeface="Inter"/>
               </a:rPr>
-              <a:t>Click the </a:t>
-            </a:r>
-            <a:r>
-              <a:rPr sz="2000" b="1">
-                <a:solidFill>
-                  <a:srgbClr val="6B6B6B"/>
-                </a:solidFill>
-                <a:latin typeface="Inter"/>
-              </a:rPr>
-              <a:t>Package</a:t>
-            </a:r>
-            <a:r>
-              <a:rPr sz="2000" b="0">
-                <a:solidFill>
-                  <a:srgbClr val="6B6B6B"/>
-                </a:solidFill>
-                <a:latin typeface="Inter"/>
-              </a:rPr>
-              <a:t> cell.</a:t>
+              <a:t>One page. Letter size. Ready to email or print.</a:t>
             </a:r>
           </a:p>
           <a:p>
@@ -7317,7 +5739,7 @@
                 </a:solidFill>
                 <a:latin typeface="Inter"/>
               </a:rPr>
-              <a:t>Pick from the list. </a:t>
+              <a:t>Saved in the </a:t>
             </a:r>
             <a:r>
               <a:rPr sz="2000" b="1">
@@ -7326,14 +5748,60 @@
                 </a:solidFill>
                 <a:latin typeface="Inter"/>
               </a:rPr>
-              <a:t>Don't type it.</a:t>
+              <a:t>Helix Quotes</a:t>
+            </a:r>
+            <a:r>
+              <a:rPr sz="2000" b="0">
+                <a:solidFill>
+                  <a:srgbClr val="6B6B6B"/>
+                </a:solidFill>
+                <a:latin typeface="Inter"/>
+              </a:rPr>
+              <a:t> folder in Google Drive.</a:t>
+            </a:r>
+          </a:p>
+          <a:p>
+            <a:pPr algn="l">
+              <a:lnSpc>
+                <a:spcPct val="120000"/>
+              </a:lnSpc>
+              <a:spcBef>
+                <a:spcPts val="1200"/>
+              </a:spcBef>
+            </a:pPr>
+            <a:r>
+              <a:rPr sz="2000" b="0">
+                <a:solidFill>
+                  <a:srgbClr val="6B6B6B"/>
+                </a:solidFill>
+                <a:latin typeface="Inter"/>
+              </a:rPr>
+              <a:t>Every quote is listed on the </a:t>
+            </a:r>
+            <a:r>
+              <a:rPr sz="2000" b="1">
+                <a:solidFill>
+                  <a:srgbClr val="6B6B6B"/>
+                </a:solidFill>
+                <a:latin typeface="Inter"/>
+              </a:rPr>
+              <a:t>Log</a:t>
+            </a:r>
+            <a:r>
+              <a:rPr sz="2000" b="0">
+                <a:solidFill>
+                  <a:srgbClr val="6B6B6B"/>
+                </a:solidFill>
+                <a:latin typeface="Inter"/>
+              </a:rPr>
+              <a:t> tab, with links.</a:t>
             </a:r>
           </a:p>
         </p:txBody>
       </p:sp>
       <p:pic>
         <p:nvPicPr>
-          <p:cNvPr id="6" name="Picture 5" descr="quote-0-180-800-560.png"/>
+          <p:cNvPr id="4" name="Picture 3" descr="onepager.png"/>
           <p:cNvPicPr>
             <a:picLocks noChangeAspect="1"/>
           </p:cNvPicPr>
@@ -7347,8 +5815,8 @@
         </p:blipFill>
         <p:spPr>
           <a:xfrm>
-            <a:off x="4160520" y="777240"/>
-            <a:ext cx="7635240" cy="5344668"/>
+            <a:off x="6035040" y="502920"/>
+            <a:ext cx="4522124" cy="5852160"/>
           </a:xfrm>
           <a:prstGeom prst="rect">
             <a:avLst/>
@@ -7357,18 +5825,18 @@
       </p:pic>
       <p:sp>
         <p:nvSpPr>
-          <p:cNvPr id="7" name="Rounded Rectangle 6"/>
+          <p:cNvPr id="5" name="Rounded Rectangle 4"/>
           <p:cNvSpPr/>
           <p:nvPr/>
         </p:nvSpPr>
         <p:spPr>
           <a:xfrm>
-            <a:off x="4160520" y="777240"/>
-            <a:ext cx="7635240" cy="5344668"/>
+            <a:off x="6035040" y="502920"/>
+            <a:ext cx="4522123" cy="5852160"/>
           </a:xfrm>
           <a:prstGeom prst="roundRect">
             <a:avLst>
-              <a:gd name="adj" fmla="val 1026"/>
+              <a:gd name="adj" fmla="val 808"/>
             </a:avLst>
           </a:prstGeom>
           <a:noFill/>
@@ -7398,133 +5866,6 @@
           <a:lstStyle/>
           <a:p>
             <a:pPr algn="ctr"/>
-          </a:p>
-        </p:txBody>
-      </p:sp>
-      <p:sp>
-        <p:nvSpPr>
-          <p:cNvPr id="8" name="Oval 7"/>
-          <p:cNvSpPr/>
-          <p:nvPr/>
-        </p:nvSpPr>
-        <p:spPr>
-          <a:xfrm>
-            <a:off x="6619604" y="1316478"/>
-            <a:ext cx="3340417" cy="477202"/>
-          </a:xfrm>
-          <a:prstGeom prst="ellipse">
-            <a:avLst/>
-          </a:prstGeom>
-          <a:noFill/>
-          <a:ln w="57150">
-            <a:solidFill>
-              <a:srgbClr val="E8382F"/>
-            </a:solidFill>
-          </a:ln>
-          <a:effectLst/>
-        </p:spPr>
-        <p:style>
-          <a:lnRef idx="1">
-            <a:schemeClr val="accent1"/>
-          </a:lnRef>
-          <a:fillRef idx="3">
-            <a:schemeClr val="accent1"/>
-          </a:fillRef>
-          <a:effectRef idx="0">
-            <a:schemeClr val="accent1"/>
-          </a:effectRef>
-          <a:fontRef idx="minor">
-            <a:schemeClr val="lt1"/>
-          </a:fontRef>
-        </p:style>
-        <p:txBody>
-          <a:bodyPr rtlCol="0" anchor="ctr"/>
-          <a:lstStyle/>
-          <a:p>
-            <a:pPr algn="ctr"/>
-          </a:p>
-        </p:txBody>
-      </p:sp>
-      <p:sp>
-        <p:nvSpPr>
-          <p:cNvPr id="9" name="Rounded Rectangle 8"/>
-          <p:cNvSpPr/>
-          <p:nvPr/>
-        </p:nvSpPr>
-        <p:spPr>
-          <a:xfrm>
-            <a:off x="9235440" y="1344768"/>
-            <a:ext cx="2468880" cy="420624"/>
-          </a:xfrm>
-          <a:prstGeom prst="roundRect">
-            <a:avLst>
-              <a:gd name="adj" fmla="val 50000"/>
-            </a:avLst>
-          </a:prstGeom>
-          <a:solidFill>
-            <a:srgbClr val="E8382F"/>
-          </a:solidFill>
-          <a:ln>
-            <a:noFill/>
-          </a:ln>
-          <a:effectLst/>
-        </p:spPr>
-        <p:style>
-          <a:lnRef idx="1">
-            <a:schemeClr val="accent1"/>
-          </a:lnRef>
-          <a:fillRef idx="3">
-            <a:schemeClr val="accent1"/>
-          </a:fillRef>
-          <a:effectRef idx="0">
-            <a:schemeClr val="accent1"/>
-          </a:effectRef>
-          <a:fontRef idx="minor">
-            <a:schemeClr val="lt1"/>
-          </a:fontRef>
-        </p:style>
-        <p:txBody>
-          <a:bodyPr rtlCol="0" anchor="ctr"/>
-          <a:lstStyle/>
-          <a:p>
-            <a:pPr algn="ctr"/>
-          </a:p>
-        </p:txBody>
-      </p:sp>
-      <p:sp>
-        <p:nvSpPr>
-          <p:cNvPr id="10" name="TextBox 9"/>
-          <p:cNvSpPr txBox="1"/>
-          <p:nvPr/>
-        </p:nvSpPr>
-        <p:spPr>
-          <a:xfrm>
-            <a:off x="9235440" y="1344768"/>
-            <a:ext cx="2468880" cy="420624"/>
-          </a:xfrm>
-          <a:prstGeom prst="rect">
-            <a:avLst/>
-          </a:prstGeom>
-          <a:noFill/>
-        </p:spPr>
-        <p:txBody>
-          <a:bodyPr wrap="square" lIns="0" rIns="0" tIns="0" bIns="0" anchor="ctr"/>
-          <a:lstStyle/>
-          <a:p>
-            <a:pPr algn="ctr">
-              <a:lnSpc>
-                <a:spcPct val="110000"/>
-              </a:lnSpc>
-            </a:pPr>
-            <a:r>
-              <a:rPr sz="1600" b="1">
-                <a:solidFill>
-                  <a:srgbClr val="FFFFFF"/>
-                </a:solidFill>
-                <a:latin typeface="Inter"/>
-              </a:rPr>
-              <a:t>Pick from the list</a:t>
-            </a:r>
           </a:p>
         </p:txBody>
       </p:sp>
@@ -7556,22 +5897,59 @@
       <p:grpSpPr/>
       <p:sp>
         <p:nvSpPr>
-          <p:cNvPr id="2" name="Rounded Rectangle 1"/>
+          <p:cNvPr id="2" name="TextBox 1"/>
+          <p:cNvSpPr txBox="1"/>
+          <p:nvPr/>
+        </p:nvSpPr>
+        <p:spPr>
+          <a:xfrm>
+            <a:off x="822960" y="777240"/>
+            <a:ext cx="10515600" cy="731520"/>
+          </a:xfrm>
+          <a:prstGeom prst="rect">
+            <a:avLst/>
+          </a:prstGeom>
+          <a:noFill/>
+        </p:spPr>
+        <p:txBody>
+          <a:bodyPr wrap="square" lIns="0" rIns="0" tIns="0" bIns="0" anchor="t"/>
+          <a:lstStyle/>
+          <a:p>
+            <a:pPr algn="l">
+              <a:lnSpc>
+                <a:spcPct val="110000"/>
+              </a:lnSpc>
+            </a:pPr>
+            <a:r>
+              <a:rPr sz="3600" b="1">
+                <a:solidFill>
+                  <a:srgbClr val="171717"/>
+                </a:solidFill>
+                <a:latin typeface="Inter"/>
+              </a:rPr>
+              <a:t>If something’s off</a:t>
+            </a:r>
+          </a:p>
+        </p:txBody>
+      </p:sp>
+      <p:sp>
+        <p:nvSpPr>
+          <p:cNvPr id="3" name="Rounded Rectangle 2"/>
           <p:cNvSpPr/>
           <p:nvPr/>
         </p:nvSpPr>
         <p:spPr>
           <a:xfrm>
-            <a:off x="548640" y="777240"/>
-            <a:ext cx="1005840" cy="457200"/>
+            <a:off x="822960" y="1783080"/>
+            <a:ext cx="10515600" cy="1005840"/>
           </a:xfrm>
           <a:prstGeom prst="roundRect">
             <a:avLst>
-              <a:gd name="adj" fmla="val 50000"/>
+              <a:gd name="adj" fmla="val 16363"/>
             </a:avLst>
           </a:prstGeom>
           <a:solidFill>
-            <a:srgbClr val="0096CF"/>
+            <a:srgbClr val="F5F5F7"/>
           </a:solidFill>
           <a:ln>
             <a:noFill/>
@@ -7602,14 +5980,14 @@
       </p:sp>
       <p:sp>
         <p:nvSpPr>
-          <p:cNvPr id="3" name="TextBox 2"/>
+          <p:cNvPr id="4" name="TextBox 3"/>
           <p:cNvSpPr txBox="1"/>
           <p:nvPr/>
         </p:nvSpPr>
         <p:spPr>
           <a:xfrm>
-            <a:off x="548640" y="777240"/>
-            <a:ext cx="1005840" cy="457200"/>
+            <a:off x="1188720" y="1965960"/>
+            <a:ext cx="9692640" cy="411480"/>
           </a:xfrm>
           <a:prstGeom prst="rect">
             <a:avLst/>
@@ -7617,36 +5995,36 @@
           <a:noFill/>
         </p:spPr>
         <p:txBody>
-          <a:bodyPr wrap="square" lIns="0" rIns="0" tIns="0" bIns="0" anchor="ctr"/>
-          <a:lstStyle/>
-          <a:p>
-            <a:pPr algn="ctr">
+          <a:bodyPr wrap="square" lIns="0" rIns="0" tIns="0" bIns="0" anchor="t"/>
+          <a:lstStyle/>
+          <a:p>
+            <a:pPr algn="l">
               <a:lnSpc>
                 <a:spcPct val="110000"/>
               </a:lnSpc>
             </a:pPr>
             <a:r>
-              <a:rPr sz="1400" b="1">
-                <a:solidFill>
-                  <a:srgbClr val="FFFFFF"/>
-                </a:solidFill>
-                <a:latin typeface="Inter"/>
-              </a:rPr>
-              <a:t>STEP 4</a:t>
-            </a:r>
-          </a:p>
-        </p:txBody>
-      </p:sp>
-      <p:sp>
-        <p:nvSpPr>
-          <p:cNvPr id="4" name="TextBox 3"/>
+              <a:rPr sz="2000" b="1">
+                <a:solidFill>
+                  <a:srgbClr val="171717"/>
+                </a:solidFill>
+                <a:latin typeface="Inter"/>
+              </a:rPr>
+              <a:t>It says “Fix these first.”</a:t>
+            </a:r>
+          </a:p>
+        </p:txBody>
+      </p:sp>
+      <p:sp>
+        <p:nvSpPr>
+          <p:cNvPr id="5" name="TextBox 4"/>
           <p:cNvSpPr txBox="1"/>
           <p:nvPr/>
         </p:nvSpPr>
         <p:spPr>
           <a:xfrm>
-            <a:off x="548640" y="1463040"/>
-            <a:ext cx="3383280" cy="1463040"/>
+            <a:off x="1188720" y="2350008"/>
+            <a:ext cx="9692640" cy="365760"/>
           </a:xfrm>
           <a:prstGeom prst="rect">
             <a:avLst/>
@@ -7659,168 +6037,42 @@
           <a:p>
             <a:pPr algn="l">
               <a:lnSpc>
-                <a:spcPct val="105000"/>
+                <a:spcPct val="110000"/>
               </a:lnSpc>
             </a:pPr>
             <a:r>
-              <a:rPr sz="3000" b="1">
-                <a:solidFill>
-                  <a:srgbClr val="171717"/>
-                </a:solidFill>
-                <a:latin typeface="Inter"/>
-              </a:rPr>
-              <a:t>Fill in the blue cells.</a:t>
-            </a:r>
-          </a:p>
-        </p:txBody>
-      </p:sp>
-      <p:sp>
-        <p:nvSpPr>
-          <p:cNvPr id="5" name="TextBox 4"/>
-          <p:cNvSpPr txBox="1"/>
-          <p:nvPr/>
-        </p:nvSpPr>
-        <p:spPr>
-          <a:xfrm>
-            <a:off x="548640" y="3108960"/>
-            <a:ext cx="3291840" cy="3566160"/>
-          </a:xfrm>
-          <a:prstGeom prst="rect">
-            <a:avLst/>
-          </a:prstGeom>
-          <a:noFill/>
-        </p:spPr>
-        <p:txBody>
-          <a:bodyPr wrap="square" lIns="0" rIns="0" tIns="0" bIns="0" anchor="t"/>
-          <a:lstStyle/>
-          <a:p>
-            <a:pPr algn="l">
-              <a:lnSpc>
-                <a:spcPct val="120000"/>
-              </a:lnSpc>
-            </a:pPr>
-            <a:r>
-              <a:rPr sz="2000" b="0">
+              <a:rPr sz="1500" b="0">
                 <a:solidFill>
                   <a:srgbClr val="6B6B6B"/>
                 </a:solidFill>
                 <a:latin typeface="Inter"/>
               </a:rPr>
-              <a:t>Only type in the </a:t>
-            </a:r>
-            <a:r>
-              <a:rPr sz="2000" b="1">
-                <a:solidFill>
-                  <a:srgbClr val="6B6B6B"/>
-                </a:solidFill>
-                <a:latin typeface="Inter"/>
-              </a:rPr>
-              <a:t>blue</a:t>
-            </a:r>
-            <a:r>
-              <a:rPr sz="2000" b="0">
-                <a:solidFill>
-                  <a:srgbClr val="6B6B6B"/>
-                </a:solidFill>
-                <a:latin typeface="Inter"/>
-              </a:rPr>
-              <a:t> cells.</a:t>
-            </a:r>
-          </a:p>
-          <a:p>
-            <a:pPr algn="l">
-              <a:lnSpc>
-                <a:spcPct val="120000"/>
-              </a:lnSpc>
-              <a:spcBef>
-                <a:spcPts val="1200"/>
-              </a:spcBef>
-            </a:pPr>
-            <a:r>
-              <a:rPr sz="2000" b="0">
-                <a:solidFill>
-                  <a:srgbClr val="6B6B6B"/>
-                </a:solidFill>
-                <a:latin typeface="Inter"/>
-              </a:rPr>
-              <a:t>The gray words next to each one tell you what goes there.</a:t>
-            </a:r>
-          </a:p>
-          <a:p>
-            <a:pPr algn="l">
-              <a:lnSpc>
-                <a:spcPct val="120000"/>
-              </a:lnSpc>
-              <a:spcBef>
-                <a:spcPts val="1200"/>
-              </a:spcBef>
-            </a:pPr>
-            <a:r>
-              <a:rPr sz="2000" b="1">
-                <a:solidFill>
-                  <a:srgbClr val="6B6B6B"/>
-                </a:solidFill>
-                <a:latin typeface="Inter"/>
-              </a:rPr>
-              <a:t>Add-ons</a:t>
-            </a:r>
-            <a:r>
-              <a:rPr sz="2000" b="0">
-                <a:solidFill>
-                  <a:srgbClr val="6B6B6B"/>
-                </a:solidFill>
-                <a:latin typeface="Inter"/>
-              </a:rPr>
-              <a:t> at the bottom are optional.</a:t>
-            </a:r>
-          </a:p>
-        </p:txBody>
-      </p:sp>
-      <p:pic>
-        <p:nvPicPr>
-          <p:cNvPr id="6" name="Picture 5" descr="quote-empty-0-180-800-560.png"/>
-          <p:cNvPicPr>
-            <a:picLocks noChangeAspect="1"/>
-          </p:cNvPicPr>
-          <p:nvPr/>
-        </p:nvPicPr>
-        <p:blipFill>
-          <a:blip r:embed="rId2"/>
-          <a:stretch>
-            <a:fillRect/>
-          </a:stretch>
-        </p:blipFill>
-        <p:spPr>
-          <a:xfrm>
-            <a:off x="4160520" y="777240"/>
-            <a:ext cx="7635240" cy="5344668"/>
-          </a:xfrm>
-          <a:prstGeom prst="rect">
-            <a:avLst/>
-          </a:prstGeom>
-        </p:spPr>
-      </p:pic>
-      <p:sp>
-        <p:nvSpPr>
-          <p:cNvPr id="7" name="Rounded Rectangle 6"/>
+              <a:t>A blue cell is empty or wrong. Fix what it lists, then click Make PDF again.</a:t>
+            </a:r>
+          </a:p>
+        </p:txBody>
+      </p:sp>
+      <p:sp>
+        <p:nvSpPr>
+          <p:cNvPr id="6" name="Rounded Rectangle 5"/>
           <p:cNvSpPr/>
           <p:nvPr/>
         </p:nvSpPr>
         <p:spPr>
           <a:xfrm>
-            <a:off x="4160520" y="777240"/>
-            <a:ext cx="7635240" cy="5344668"/>
+            <a:off x="822960" y="2971800"/>
+            <a:ext cx="10515600" cy="1005840"/>
           </a:xfrm>
           <a:prstGeom prst="roundRect">
             <a:avLst>
-              <a:gd name="adj" fmla="val 1026"/>
+              <a:gd name="adj" fmla="val 16363"/>
             </a:avLst>
           </a:prstGeom>
-          <a:noFill/>
-          <a:ln w="9525">
-            <a:solidFill>
-              <a:srgbClr val="DADCE0"/>
-            </a:solidFill>
+          <a:solidFill>
+            <a:srgbClr val="F5F5F7"/>
+          </a:solidFill>
+          <a:ln>
+            <a:noFill/>
           </a:ln>
           <a:effectLst/>
         </p:spPr>
@@ -7848,23 +6100,99 @@
       </p:sp>
       <p:sp>
         <p:nvSpPr>
-          <p:cNvPr id="8" name="Oval 7"/>
+          <p:cNvPr id="7" name="TextBox 6"/>
+          <p:cNvSpPr txBox="1"/>
+          <p:nvPr/>
+        </p:nvSpPr>
+        <p:spPr>
+          <a:xfrm>
+            <a:off x="1188720" y="3154680"/>
+            <a:ext cx="9692640" cy="411480"/>
+          </a:xfrm>
+          <a:prstGeom prst="rect">
+            <a:avLst/>
+          </a:prstGeom>
+          <a:noFill/>
+        </p:spPr>
+        <p:txBody>
+          <a:bodyPr wrap="square" lIns="0" rIns="0" tIns="0" bIns="0" anchor="t"/>
+          <a:lstStyle/>
+          <a:p>
+            <a:pPr algn="l">
+              <a:lnSpc>
+                <a:spcPct val="110000"/>
+              </a:lnSpc>
+            </a:pPr>
+            <a:r>
+              <a:rPr sz="2000" b="1">
+                <a:solidFill>
+                  <a:srgbClr val="171717"/>
+                </a:solidFill>
+                <a:latin typeface="Inter"/>
+              </a:rPr>
+              <a:t>A price is wrong.</a:t>
+            </a:r>
+          </a:p>
+        </p:txBody>
+      </p:sp>
+      <p:sp>
+        <p:nvSpPr>
+          <p:cNvPr id="8" name="TextBox 7"/>
+          <p:cNvSpPr txBox="1"/>
+          <p:nvPr/>
+        </p:nvSpPr>
+        <p:spPr>
+          <a:xfrm>
+            <a:off x="1188720" y="3538728"/>
+            <a:ext cx="9692640" cy="365760"/>
+          </a:xfrm>
+          <a:prstGeom prst="rect">
+            <a:avLst/>
+          </a:prstGeom>
+          <a:noFill/>
+        </p:spPr>
+        <p:txBody>
+          <a:bodyPr wrap="square" lIns="0" rIns="0" tIns="0" bIns="0" anchor="t"/>
+          <a:lstStyle/>
+          <a:p>
+            <a:pPr algn="l">
+              <a:lnSpc>
+                <a:spcPct val="110000"/>
+              </a:lnSpc>
+            </a:pPr>
+            <a:r>
+              <a:rPr sz="1500" b="0">
+                <a:solidFill>
+                  <a:srgbClr val="6B6B6B"/>
+                </a:solidFill>
+                <a:latin typeface="Inter"/>
+              </a:rPr>
+              <a:t>Go to the Packages tab and change the number. Every new quote uses it.</a:t>
+            </a:r>
+          </a:p>
+        </p:txBody>
+      </p:sp>
+      <p:sp>
+        <p:nvSpPr>
+          <p:cNvPr id="9" name="Rounded Rectangle 8"/>
           <p:cNvSpPr/>
           <p:nvPr/>
         </p:nvSpPr>
         <p:spPr>
           <a:xfrm>
-            <a:off x="6619604" y="1602800"/>
-            <a:ext cx="3340417" cy="477202"/>
-          </a:xfrm>
-          <a:prstGeom prst="ellipse">
-            <a:avLst/>
-          </a:prstGeom>
-          <a:noFill/>
-          <a:ln w="57150">
-            <a:solidFill>
-              <a:srgbClr val="E8382F"/>
-            </a:solidFill>
+            <a:off x="822960" y="4160520"/>
+            <a:ext cx="10515600" cy="1005840"/>
+          </a:xfrm>
+          <a:prstGeom prst="roundRect">
+            <a:avLst>
+              <a:gd name="adj" fmla="val 16363"/>
+            </a:avLst>
+          </a:prstGeom>
+          <a:solidFill>
+            <a:srgbClr val="F5F5F7"/>
+          </a:solidFill>
+          <a:ln>
+            <a:noFill/>
           </a:ln>
           <a:effectLst/>
         </p:spPr>
@@ -7892,23 +6220,99 @@
       </p:sp>
       <p:sp>
         <p:nvSpPr>
-          <p:cNvPr id="9" name="Oval 8"/>
+          <p:cNvPr id="10" name="TextBox 9"/>
+          <p:cNvSpPr txBox="1"/>
+          <p:nvPr/>
+        </p:nvSpPr>
+        <p:spPr>
+          <a:xfrm>
+            <a:off x="1188720" y="4343400"/>
+            <a:ext cx="9692640" cy="411480"/>
+          </a:xfrm>
+          <a:prstGeom prst="rect">
+            <a:avLst/>
+          </a:prstGeom>
+          <a:noFill/>
+        </p:spPr>
+        <p:txBody>
+          <a:bodyPr wrap="square" lIns="0" rIns="0" tIns="0" bIns="0" anchor="t"/>
+          <a:lstStyle/>
+          <a:p>
+            <a:pPr algn="l">
+              <a:lnSpc>
+                <a:spcPct val="110000"/>
+              </a:lnSpc>
+            </a:pPr>
+            <a:r>
+              <a:rPr sz="2000" b="1">
+                <a:solidFill>
+                  <a:srgbClr val="171717"/>
+                </a:solidFill>
+                <a:latin typeface="Inter"/>
+              </a:rPr>
+              <a:t>The buttons don’t work.</a:t>
+            </a:r>
+          </a:p>
+        </p:txBody>
+      </p:sp>
+      <p:sp>
+        <p:nvSpPr>
+          <p:cNvPr id="11" name="TextBox 10"/>
+          <p:cNvSpPr txBox="1"/>
+          <p:nvPr/>
+        </p:nvSpPr>
+        <p:spPr>
+          <a:xfrm>
+            <a:off x="1188720" y="4727448"/>
+            <a:ext cx="9692640" cy="365760"/>
+          </a:xfrm>
+          <a:prstGeom prst="rect">
+            <a:avLst/>
+          </a:prstGeom>
+          <a:noFill/>
+        </p:spPr>
+        <p:txBody>
+          <a:bodyPr wrap="square" lIns="0" rIns="0" tIns="0" bIns="0" anchor="t"/>
+          <a:lstStyle/>
+          <a:p>
+            <a:pPr algn="l">
+              <a:lnSpc>
+                <a:spcPct val="110000"/>
+              </a:lnSpc>
+            </a:pPr>
+            <a:r>
+              <a:rPr sz="1500" b="0">
+                <a:solidFill>
+                  <a:srgbClr val="6B6B6B"/>
+                </a:solidFill>
+                <a:latin typeface="Inter"/>
+              </a:rPr>
+              <a:t>Use the Quotes menu at the top instead. The phone app has no buttons.</a:t>
+            </a:r>
+          </a:p>
+        </p:txBody>
+      </p:sp>
+      <p:sp>
+        <p:nvSpPr>
+          <p:cNvPr id="12" name="Rounded Rectangle 11"/>
           <p:cNvSpPr/>
           <p:nvPr/>
         </p:nvSpPr>
         <p:spPr>
           <a:xfrm>
-            <a:off x="6619604" y="1889121"/>
-            <a:ext cx="3340417" cy="477202"/>
-          </a:xfrm>
-          <a:prstGeom prst="ellipse">
-            <a:avLst/>
-          </a:prstGeom>
-          <a:noFill/>
-          <a:ln w="57150">
-            <a:solidFill>
-              <a:srgbClr val="E8382F"/>
-            </a:solidFill>
+            <a:off x="822960" y="5349240"/>
+            <a:ext cx="10515600" cy="1005840"/>
+          </a:xfrm>
+          <a:prstGeom prst="roundRect">
+            <a:avLst>
+              <a:gd name="adj" fmla="val 16363"/>
+            </a:avLst>
+          </a:prstGeom>
+          <a:solidFill>
+            <a:srgbClr val="F5F5F7"/>
+          </a:solidFill>
+          <a:ln>
+            <a:noFill/>
           </a:ln>
           <a:effectLst/>
         </p:spPr>
@@ -7936,60 +6340,14 @@
       </p:sp>
       <p:sp>
         <p:nvSpPr>
-          <p:cNvPr id="10" name="Rounded Rectangle 9"/>
-          <p:cNvSpPr/>
-          <p:nvPr/>
-        </p:nvSpPr>
-        <p:spPr>
-          <a:xfrm>
-            <a:off x="9235440" y="1917411"/>
-            <a:ext cx="2468880" cy="420624"/>
-          </a:xfrm>
-          <a:prstGeom prst="roundRect">
-            <a:avLst>
-              <a:gd name="adj" fmla="val 50000"/>
-            </a:avLst>
-          </a:prstGeom>
-          <a:solidFill>
-            <a:srgbClr val="E8382F"/>
-          </a:solidFill>
-          <a:ln>
-            <a:noFill/>
-          </a:ln>
-          <a:effectLst/>
-        </p:spPr>
-        <p:style>
-          <a:lnRef idx="1">
-            <a:schemeClr val="accent1"/>
-          </a:lnRef>
-          <a:fillRef idx="3">
-            <a:schemeClr val="accent1"/>
-          </a:fillRef>
-          <a:effectRef idx="0">
-            <a:schemeClr val="accent1"/>
-          </a:effectRef>
-          <a:fontRef idx="minor">
-            <a:schemeClr val="lt1"/>
-          </a:fontRef>
-        </p:style>
-        <p:txBody>
-          <a:bodyPr rtlCol="0" anchor="ctr"/>
-          <a:lstStyle/>
-          <a:p>
-            <a:pPr algn="ctr"/>
-          </a:p>
-        </p:txBody>
-      </p:sp>
-      <p:sp>
-        <p:nvSpPr>
-          <p:cNvPr id="11" name="TextBox 10"/>
+          <p:cNvPr id="13" name="TextBox 12"/>
           <p:cNvSpPr txBox="1"/>
           <p:nvPr/>
         </p:nvSpPr>
         <p:spPr>
           <a:xfrm>
-            <a:off x="9235440" y="1917411"/>
-            <a:ext cx="2468880" cy="420624"/>
+            <a:off x="1188720" y="5532120"/>
+            <a:ext cx="9692640" cy="411480"/>
           </a:xfrm>
           <a:prstGeom prst="rect">
             <a:avLst/>
@@ -7997,108 +6355,36 @@
           <a:noFill/>
         </p:spPr>
         <p:txBody>
-          <a:bodyPr wrap="square" lIns="0" rIns="0" tIns="0" bIns="0" anchor="ctr"/>
-          <a:lstStyle/>
-          <a:p>
-            <a:pPr algn="ctr">
+          <a:bodyPr wrap="square" lIns="0" rIns="0" tIns="0" bIns="0" anchor="t"/>
+          <a:lstStyle/>
+          <a:p>
+            <a:pPr algn="l">
               <a:lnSpc>
                 <a:spcPct val="110000"/>
               </a:lnSpc>
             </a:pPr>
             <a:r>
-              <a:rPr sz="1600" b="1">
-                <a:solidFill>
-                  <a:srgbClr val="FFFFFF"/>
-                </a:solidFill>
-                <a:latin typeface="Inter"/>
-              </a:rPr>
-              <a:t>Type these in</a:t>
-            </a:r>
-          </a:p>
-        </p:txBody>
-      </p:sp>
-    </p:spTree>
-  </p:cSld>
-  <p:clrMapOvr>
-    <a:masterClrMapping/>
-  </p:clrMapOvr>
-</p:sld>
-</file>
-
-<file path=ppt/slides/slide7.xml><?xml version="1.0" encoding="utf-8"?>
-<p:sld xmlns:a="http://schemas.openxmlformats.org/drawingml/2006/main" xmlns:p="http://schemas.openxmlformats.org/presentationml/2006/main" xmlns:r="http://schemas.openxmlformats.org/officeDocument/2006/relationships">
-  <p:cSld>
-    <p:bg>
-      <p:bgPr>
-        <a:solidFill>
-          <a:srgbClr val="FFFFFF"/>
-        </a:solidFill>
-        <a:effectLst/>
-      </p:bgPr>
-    </p:bg>
-    <p:spTree>
-      <p:nvGrpSpPr>
-        <p:cNvPr id="1" name=""/>
-        <p:cNvGrpSpPr/>
-        <p:nvPr/>
-      </p:nvGrpSpPr>
-      <p:grpSpPr/>
-      <p:sp>
-        <p:nvSpPr>
-          <p:cNvPr id="2" name="Rounded Rectangle 1"/>
-          <p:cNvSpPr/>
-          <p:nvPr/>
-        </p:nvSpPr>
-        <p:spPr>
-          <a:xfrm>
-            <a:off x="548640" y="777240"/>
-            <a:ext cx="1005840" cy="457200"/>
-          </a:xfrm>
-          <a:prstGeom prst="roundRect">
-            <a:avLst>
-              <a:gd name="adj" fmla="val 50000"/>
-            </a:avLst>
-          </a:prstGeom>
-          <a:solidFill>
-            <a:srgbClr val="0096CF"/>
-          </a:solidFill>
-          <a:ln>
-            <a:noFill/>
-          </a:ln>
-          <a:effectLst/>
-        </p:spPr>
-        <p:style>
-          <a:lnRef idx="1">
-            <a:schemeClr val="accent1"/>
-          </a:lnRef>
-          <a:fillRef idx="3">
-            <a:schemeClr val="accent1"/>
-          </a:fillRef>
-          <a:effectRef idx="0">
-            <a:schemeClr val="accent1"/>
-          </a:effectRef>
-          <a:fontRef idx="minor">
-            <a:schemeClr val="lt1"/>
-          </a:fontRef>
-        </p:style>
-        <p:txBody>
-          <a:bodyPr rtlCol="0" anchor="ctr"/>
-          <a:lstStyle/>
-          <a:p>
-            <a:pPr algn="ctr"/>
-          </a:p>
-        </p:txBody>
-      </p:sp>
-      <p:sp>
-        <p:nvSpPr>
-          <p:cNvPr id="3" name="TextBox 2"/>
+              <a:rPr sz="2000" b="1">
+                <a:solidFill>
+                  <a:srgbClr val="171717"/>
+                </a:solidFill>
+                <a:latin typeface="Inter"/>
+              </a:rPr>
+              <a:t>Only type in blue cells.</a:t>
+            </a:r>
+          </a:p>
+        </p:txBody>
+      </p:sp>
+      <p:sp>
+        <p:nvSpPr>
+          <p:cNvPr id="14" name="TextBox 13"/>
           <p:cNvSpPr txBox="1"/>
           <p:nvPr/>
         </p:nvSpPr>
         <p:spPr>
           <a:xfrm>
-            <a:off x="548640" y="777240"/>
-            <a:ext cx="1005840" cy="457200"/>
+            <a:off x="1188720" y="5916168"/>
+            <a:ext cx="9692640" cy="365760"/>
           </a:xfrm>
           <a:prstGeom prst="rect">
             <a:avLst/>
@@ -8106,983 +6392,23 @@
           <a:noFill/>
         </p:spPr>
         <p:txBody>
-          <a:bodyPr wrap="square" lIns="0" rIns="0" tIns="0" bIns="0" anchor="ctr"/>
-          <a:lstStyle/>
-          <a:p>
-            <a:pPr algn="ctr">
+          <a:bodyPr wrap="square" lIns="0" rIns="0" tIns="0" bIns="0" anchor="t"/>
+          <a:lstStyle/>
+          <a:p>
+            <a:pPr algn="l">
               <a:lnSpc>
                 <a:spcPct val="110000"/>
               </a:lnSpc>
             </a:pPr>
             <a:r>
-              <a:rPr sz="1400" b="1">
-                <a:solidFill>
-                  <a:srgbClr val="FFFFFF"/>
-                </a:solidFill>
-                <a:latin typeface="Inter"/>
-              </a:rPr>
-              <a:t>STEP 5</a:t>
-            </a:r>
-          </a:p>
-        </p:txBody>
-      </p:sp>
-      <p:sp>
-        <p:nvSpPr>
-          <p:cNvPr id="4" name="TextBox 3"/>
-          <p:cNvSpPr txBox="1"/>
-          <p:nvPr/>
-        </p:nvSpPr>
-        <p:spPr>
-          <a:xfrm>
-            <a:off x="548640" y="1463040"/>
-            <a:ext cx="3383280" cy="1463040"/>
-          </a:xfrm>
-          <a:prstGeom prst="rect">
-            <a:avLst/>
-          </a:prstGeom>
-          <a:noFill/>
-        </p:spPr>
-        <p:txBody>
-          <a:bodyPr wrap="square" lIns="0" rIns="0" tIns="0" bIns="0" anchor="t"/>
-          <a:lstStyle/>
-          <a:p>
-            <a:pPr algn="l">
-              <a:lnSpc>
-                <a:spcPct val="105000"/>
-              </a:lnSpc>
-            </a:pPr>
-            <a:r>
-              <a:rPr sz="3000" b="1">
-                <a:solidFill>
-                  <a:srgbClr val="171717"/>
-                </a:solidFill>
-                <a:latin typeface="Inter"/>
-              </a:rPr>
-              <a:t>Click Make PDF.</a:t>
-            </a:r>
-          </a:p>
-        </p:txBody>
-      </p:sp>
-      <p:sp>
-        <p:nvSpPr>
-          <p:cNvPr id="5" name="TextBox 4"/>
-          <p:cNvSpPr txBox="1"/>
-          <p:nvPr/>
-        </p:nvSpPr>
-        <p:spPr>
-          <a:xfrm>
-            <a:off x="548640" y="3108960"/>
-            <a:ext cx="3291840" cy="3566160"/>
-          </a:xfrm>
-          <a:prstGeom prst="rect">
-            <a:avLst/>
-          </a:prstGeom>
-          <a:noFill/>
-        </p:spPr>
-        <p:txBody>
-          <a:bodyPr wrap="square" lIns="0" rIns="0" tIns="0" bIns="0" anchor="t"/>
-          <a:lstStyle/>
-          <a:p>
-            <a:pPr algn="l">
-              <a:lnSpc>
-                <a:spcPct val="120000"/>
-              </a:lnSpc>
-            </a:pPr>
-            <a:r>
-              <a:rPr sz="2000" b="0">
+              <a:rPr sz="1500" b="0">
                 <a:solidFill>
                   <a:srgbClr val="6B6B6B"/>
                 </a:solidFill>
                 <a:latin typeface="Inter"/>
               </a:rPr>
-              <a:t>Wait a few seconds.</a:t>
-            </a:r>
-          </a:p>
-          <a:p>
-            <a:pPr algn="l">
-              <a:lnSpc>
-                <a:spcPct val="120000"/>
-              </a:lnSpc>
-              <a:spcBef>
-                <a:spcPts val="1200"/>
-              </a:spcBef>
-            </a:pPr>
-            <a:r>
-              <a:rPr sz="2000" b="0">
-                <a:solidFill>
-                  <a:srgbClr val="6B6B6B"/>
-                </a:solidFill>
-                <a:latin typeface="Inter"/>
-              </a:rPr>
-              <a:t>If something is missing, it </a:t>
-            </a:r>
-            <a:r>
-              <a:rPr sz="2000" b="1">
-                <a:solidFill>
-                  <a:srgbClr val="6B6B6B"/>
-                </a:solidFill>
-                <a:latin typeface="Inter"/>
-              </a:rPr>
-              <a:t>tells you what to fix</a:t>
-            </a:r>
-            <a:r>
-              <a:rPr sz="2000" b="0">
-                <a:solidFill>
-                  <a:srgbClr val="6B6B6B"/>
-                </a:solidFill>
-                <a:latin typeface="Inter"/>
-              </a:rPr>
-              <a:t>.</a:t>
-            </a:r>
-          </a:p>
-        </p:txBody>
-      </p:sp>
-      <p:pic>
-        <p:nvPicPr>
-          <p:cNvPr id="6" name="Picture 5" descr="quote-560-180-760-540.png"/>
-          <p:cNvPicPr>
-            <a:picLocks noChangeAspect="1"/>
-          </p:cNvPicPr>
-          <p:nvPr/>
-        </p:nvPicPr>
-        <p:blipFill>
-          <a:blip r:embed="rId2"/>
-          <a:stretch>
-            <a:fillRect/>
-          </a:stretch>
-        </p:blipFill>
-        <p:spPr>
-          <a:xfrm>
-            <a:off x="4160520" y="777240"/>
-            <a:ext cx="7592906" cy="5394959"/>
-          </a:xfrm>
-          <a:prstGeom prst="rect">
-            <a:avLst/>
-          </a:prstGeom>
-        </p:spPr>
-      </p:pic>
-      <p:sp>
-        <p:nvSpPr>
-          <p:cNvPr id="7" name="Rounded Rectangle 6"/>
-          <p:cNvSpPr/>
-          <p:nvPr/>
-        </p:nvSpPr>
-        <p:spPr>
-          <a:xfrm>
-            <a:off x="4160520" y="777240"/>
-            <a:ext cx="7592906" cy="5394959"/>
-          </a:xfrm>
-          <a:prstGeom prst="roundRect">
-            <a:avLst>
-              <a:gd name="adj" fmla="val 1016"/>
-            </a:avLst>
-          </a:prstGeom>
-          <a:noFill/>
-          <a:ln w="9525">
-            <a:solidFill>
-              <a:srgbClr val="DADCE0"/>
-            </a:solidFill>
-          </a:ln>
-          <a:effectLst/>
-        </p:spPr>
-        <p:style>
-          <a:lnRef idx="1">
-            <a:schemeClr val="accent1"/>
-          </a:lnRef>
-          <a:fillRef idx="3">
-            <a:schemeClr val="accent1"/>
-          </a:fillRef>
-          <a:effectRef idx="0">
-            <a:schemeClr val="accent1"/>
-          </a:effectRef>
-          <a:fontRef idx="minor">
-            <a:schemeClr val="lt1"/>
-          </a:fontRef>
-        </p:style>
-        <p:txBody>
-          <a:bodyPr rtlCol="0" anchor="ctr"/>
-          <a:lstStyle/>
-          <a:p>
-            <a:pPr algn="ctr"/>
-          </a:p>
-        </p:txBody>
-      </p:sp>
-      <p:sp>
-        <p:nvSpPr>
-          <p:cNvPr id="8" name="Oval 7"/>
-          <p:cNvSpPr/>
-          <p:nvPr/>
-        </p:nvSpPr>
-        <p:spPr>
-          <a:xfrm>
-            <a:off x="8756226" y="1356698"/>
-            <a:ext cx="2497666" cy="719328"/>
-          </a:xfrm>
-          <a:prstGeom prst="ellipse">
-            <a:avLst/>
-          </a:prstGeom>
-          <a:noFill/>
-          <a:ln w="57150">
-            <a:solidFill>
-              <a:srgbClr val="E8382F"/>
-            </a:solidFill>
-          </a:ln>
-          <a:effectLst/>
-        </p:spPr>
-        <p:style>
-          <a:lnRef idx="1">
-            <a:schemeClr val="accent1"/>
-          </a:lnRef>
-          <a:fillRef idx="3">
-            <a:schemeClr val="accent1"/>
-          </a:fillRef>
-          <a:effectRef idx="0">
-            <a:schemeClr val="accent1"/>
-          </a:effectRef>
-          <a:fontRef idx="minor">
-            <a:schemeClr val="lt1"/>
-          </a:fontRef>
-        </p:style>
-        <p:txBody>
-          <a:bodyPr rtlCol="0" anchor="ctr"/>
-          <a:lstStyle/>
-          <a:p>
-            <a:pPr algn="ctr"/>
-          </a:p>
-        </p:txBody>
-      </p:sp>
-      <p:sp>
-        <p:nvSpPr>
-          <p:cNvPr id="9" name="Rounded Rectangle 8"/>
-          <p:cNvSpPr/>
-          <p:nvPr/>
-        </p:nvSpPr>
-        <p:spPr>
-          <a:xfrm>
-            <a:off x="6177618" y="1506050"/>
-            <a:ext cx="2468880" cy="420624"/>
-          </a:xfrm>
-          <a:prstGeom prst="roundRect">
-            <a:avLst>
-              <a:gd name="adj" fmla="val 50000"/>
-            </a:avLst>
-          </a:prstGeom>
-          <a:solidFill>
-            <a:srgbClr val="E8382F"/>
-          </a:solidFill>
-          <a:ln>
-            <a:noFill/>
-          </a:ln>
-          <a:effectLst/>
-        </p:spPr>
-        <p:style>
-          <a:lnRef idx="1">
-            <a:schemeClr val="accent1"/>
-          </a:lnRef>
-          <a:fillRef idx="3">
-            <a:schemeClr val="accent1"/>
-          </a:fillRef>
-          <a:effectRef idx="0">
-            <a:schemeClr val="accent1"/>
-          </a:effectRef>
-          <a:fontRef idx="minor">
-            <a:schemeClr val="lt1"/>
-          </a:fontRef>
-        </p:style>
-        <p:txBody>
-          <a:bodyPr rtlCol="0" anchor="ctr"/>
-          <a:lstStyle/>
-          <a:p>
-            <a:pPr algn="ctr"/>
-          </a:p>
-        </p:txBody>
-      </p:sp>
-      <p:sp>
-        <p:nvSpPr>
-          <p:cNvPr id="10" name="TextBox 9"/>
-          <p:cNvSpPr txBox="1"/>
-          <p:nvPr/>
-        </p:nvSpPr>
-        <p:spPr>
-          <a:xfrm>
-            <a:off x="6177618" y="1506050"/>
-            <a:ext cx="2468880" cy="420624"/>
-          </a:xfrm>
-          <a:prstGeom prst="rect">
-            <a:avLst/>
-          </a:prstGeom>
-          <a:noFill/>
-        </p:spPr>
-        <p:txBody>
-          <a:bodyPr wrap="square" lIns="0" rIns="0" tIns="0" bIns="0" anchor="ctr"/>
-          <a:lstStyle/>
-          <a:p>
-            <a:pPr algn="ctr">
-              <a:lnSpc>
-                <a:spcPct val="110000"/>
-              </a:lnSpc>
-            </a:pPr>
-            <a:r>
-              <a:rPr sz="1600" b="1">
-                <a:solidFill>
-                  <a:srgbClr val="FFFFFF"/>
-                </a:solidFill>
-                <a:latin typeface="Inter"/>
-              </a:rPr>
-              <a:t>Click here</a:t>
-            </a:r>
-          </a:p>
-        </p:txBody>
-      </p:sp>
-    </p:spTree>
-  </p:cSld>
-  <p:clrMapOvr>
-    <a:masterClrMapping/>
-  </p:clrMapOvr>
-</p:sld>
-</file>
-
-<file path=ppt/slides/slide8.xml><?xml version="1.0" encoding="utf-8"?>
-<p:sld xmlns:a="http://schemas.openxmlformats.org/drawingml/2006/main" xmlns:p="http://schemas.openxmlformats.org/presentationml/2006/main" xmlns:r="http://schemas.openxmlformats.org/officeDocument/2006/relationships">
-  <p:cSld>
-    <p:bg>
-      <p:bgPr>
-        <a:solidFill>
-          <a:srgbClr val="FFFFFF"/>
-        </a:solidFill>
-        <a:effectLst/>
-      </p:bgPr>
-    </p:bg>
-    <p:spTree>
-      <p:nvGrpSpPr>
-        <p:cNvPr id="1" name=""/>
-        <p:cNvGrpSpPr/>
-        <p:nvPr/>
-      </p:nvGrpSpPr>
-      <p:grpSpPr/>
-      <p:sp>
-        <p:nvSpPr>
-          <p:cNvPr id="2" name="Rounded Rectangle 1"/>
-          <p:cNvSpPr/>
-          <p:nvPr/>
-        </p:nvSpPr>
-        <p:spPr>
-          <a:xfrm>
-            <a:off x="548640" y="777240"/>
-            <a:ext cx="1005840" cy="457200"/>
-          </a:xfrm>
-          <a:prstGeom prst="roundRect">
-            <a:avLst>
-              <a:gd name="adj" fmla="val 50000"/>
-            </a:avLst>
-          </a:prstGeom>
-          <a:solidFill>
-            <a:srgbClr val="0096CF"/>
-          </a:solidFill>
-          <a:ln>
-            <a:noFill/>
-          </a:ln>
-          <a:effectLst/>
-        </p:spPr>
-        <p:style>
-          <a:lnRef idx="1">
-            <a:schemeClr val="accent1"/>
-          </a:lnRef>
-          <a:fillRef idx="3">
-            <a:schemeClr val="accent1"/>
-          </a:fillRef>
-          <a:effectRef idx="0">
-            <a:schemeClr val="accent1"/>
-          </a:effectRef>
-          <a:fontRef idx="minor">
-            <a:schemeClr val="lt1"/>
-          </a:fontRef>
-        </p:style>
-        <p:txBody>
-          <a:bodyPr rtlCol="0" anchor="ctr"/>
-          <a:lstStyle/>
-          <a:p>
-            <a:pPr algn="ctr"/>
-          </a:p>
-        </p:txBody>
-      </p:sp>
-      <p:sp>
-        <p:nvSpPr>
-          <p:cNvPr id="3" name="TextBox 2"/>
-          <p:cNvSpPr txBox="1"/>
-          <p:nvPr/>
-        </p:nvSpPr>
-        <p:spPr>
-          <a:xfrm>
-            <a:off x="548640" y="777240"/>
-            <a:ext cx="1005840" cy="457200"/>
-          </a:xfrm>
-          <a:prstGeom prst="rect">
-            <a:avLst/>
-          </a:prstGeom>
-          <a:noFill/>
-        </p:spPr>
-        <p:txBody>
-          <a:bodyPr wrap="square" lIns="0" rIns="0" tIns="0" bIns="0" anchor="ctr"/>
-          <a:lstStyle/>
-          <a:p>
-            <a:pPr algn="ctr">
-              <a:lnSpc>
-                <a:spcPct val="110000"/>
-              </a:lnSpc>
-            </a:pPr>
-            <a:r>
-              <a:rPr sz="1400" b="1">
-                <a:solidFill>
-                  <a:srgbClr val="FFFFFF"/>
-                </a:solidFill>
-                <a:latin typeface="Inter"/>
-              </a:rPr>
-              <a:t>STEP 6</a:t>
-            </a:r>
-          </a:p>
-        </p:txBody>
-      </p:sp>
-      <p:sp>
-        <p:nvSpPr>
-          <p:cNvPr id="4" name="TextBox 3"/>
-          <p:cNvSpPr txBox="1"/>
-          <p:nvPr/>
-        </p:nvSpPr>
-        <p:spPr>
-          <a:xfrm>
-            <a:off x="548640" y="1463040"/>
-            <a:ext cx="3383280" cy="1463040"/>
-          </a:xfrm>
-          <a:prstGeom prst="rect">
-            <a:avLst/>
-          </a:prstGeom>
-          <a:noFill/>
-        </p:spPr>
-        <p:txBody>
-          <a:bodyPr wrap="square" lIns="0" rIns="0" tIns="0" bIns="0" anchor="t"/>
-          <a:lstStyle/>
-          <a:p>
-            <a:pPr algn="l">
-              <a:lnSpc>
-                <a:spcPct val="105000"/>
-              </a:lnSpc>
-            </a:pPr>
-            <a:r>
-              <a:rPr sz="3000" b="1">
-                <a:solidFill>
-                  <a:srgbClr val="171717"/>
-                </a:solidFill>
-                <a:latin typeface="Inter"/>
-              </a:rPr>
-              <a:t>Click Open PDF.</a:t>
-            </a:r>
-          </a:p>
-        </p:txBody>
-      </p:sp>
-      <p:sp>
-        <p:nvSpPr>
-          <p:cNvPr id="5" name="TextBox 4"/>
-          <p:cNvSpPr txBox="1"/>
-          <p:nvPr/>
-        </p:nvSpPr>
-        <p:spPr>
-          <a:xfrm>
-            <a:off x="548640" y="3108960"/>
-            <a:ext cx="3291840" cy="3566160"/>
-          </a:xfrm>
-          <a:prstGeom prst="rect">
-            <a:avLst/>
-          </a:prstGeom>
-          <a:noFill/>
-        </p:spPr>
-        <p:txBody>
-          <a:bodyPr wrap="square" lIns="0" rIns="0" tIns="0" bIns="0" anchor="t"/>
-          <a:lstStyle/>
-          <a:p>
-            <a:pPr algn="l">
-              <a:lnSpc>
-                <a:spcPct val="120000"/>
-              </a:lnSpc>
-            </a:pPr>
-            <a:r>
-              <a:rPr sz="2000" b="0">
-                <a:solidFill>
-                  <a:srgbClr val="6B6B6B"/>
-                </a:solidFill>
-                <a:latin typeface="Inter"/>
-              </a:rPr>
-              <a:t>That's the quote. </a:t>
-            </a:r>
-            <a:r>
-              <a:rPr sz="2000" b="1">
-                <a:solidFill>
-                  <a:srgbClr val="6B6B6B"/>
-                </a:solidFill>
-                <a:latin typeface="Inter"/>
-              </a:rPr>
-              <a:t>Send it to the client.</a:t>
-            </a:r>
-          </a:p>
-          <a:p>
-            <a:pPr algn="l">
-              <a:lnSpc>
-                <a:spcPct val="120000"/>
-              </a:lnSpc>
-              <a:spcBef>
-                <a:spcPts val="1200"/>
-              </a:spcBef>
-            </a:pPr>
-            <a:r>
-              <a:rPr sz="2000" b="0">
-                <a:solidFill>
-                  <a:srgbClr val="6B6B6B"/>
-                </a:solidFill>
-                <a:latin typeface="Inter"/>
-              </a:rPr>
-              <a:t>Need to change a word? Click </a:t>
-            </a:r>
-            <a:r>
-              <a:rPr sz="2000" b="1">
-                <a:solidFill>
-                  <a:srgbClr val="6B6B6B"/>
-                </a:solidFill>
-                <a:latin typeface="Inter"/>
-              </a:rPr>
-              <a:t>Edit as Google Doc</a:t>
-            </a:r>
-            <a:r>
-              <a:rPr sz="2000" b="0">
-                <a:solidFill>
-                  <a:srgbClr val="6B6B6B"/>
-                </a:solidFill>
-                <a:latin typeface="Inter"/>
-              </a:rPr>
-              <a:t>.</a:t>
-            </a:r>
-          </a:p>
-        </p:txBody>
-      </p:sp>
-      <p:pic>
-        <p:nvPicPr>
-          <p:cNvPr id="6" name="Picture 5" descr="done-380-160-900-620.png"/>
-          <p:cNvPicPr>
-            <a:picLocks noChangeAspect="1"/>
-          </p:cNvPicPr>
-          <p:nvPr/>
-        </p:nvPicPr>
-        <p:blipFill>
-          <a:blip r:embed="rId2"/>
-          <a:stretch>
-            <a:fillRect/>
-          </a:stretch>
-        </p:blipFill>
-        <p:spPr>
-          <a:xfrm>
-            <a:off x="4160520" y="777240"/>
-            <a:ext cx="7635240" cy="5259831"/>
-          </a:xfrm>
-          <a:prstGeom prst="rect">
-            <a:avLst/>
-          </a:prstGeom>
-        </p:spPr>
-      </p:pic>
-      <p:sp>
-        <p:nvSpPr>
-          <p:cNvPr id="7" name="Rounded Rectangle 6"/>
-          <p:cNvSpPr/>
-          <p:nvPr/>
-        </p:nvSpPr>
-        <p:spPr>
-          <a:xfrm>
-            <a:off x="4160520" y="777240"/>
-            <a:ext cx="7635240" cy="5259831"/>
-          </a:xfrm>
-          <a:prstGeom prst="roundRect">
-            <a:avLst>
-              <a:gd name="adj" fmla="val 1043"/>
-            </a:avLst>
-          </a:prstGeom>
-          <a:noFill/>
-          <a:ln w="9525">
-            <a:solidFill>
-              <a:srgbClr val="DADCE0"/>
-            </a:solidFill>
-          </a:ln>
-          <a:effectLst/>
-        </p:spPr>
-        <p:style>
-          <a:lnRef idx="1">
-            <a:schemeClr val="accent1"/>
-          </a:lnRef>
-          <a:fillRef idx="3">
-            <a:schemeClr val="accent1"/>
-          </a:fillRef>
-          <a:effectRef idx="0">
-            <a:schemeClr val="accent1"/>
-          </a:effectRef>
-          <a:fontRef idx="minor">
-            <a:schemeClr val="lt1"/>
-          </a:fontRef>
-        </p:style>
-        <p:txBody>
-          <a:bodyPr rtlCol="0" anchor="ctr"/>
-          <a:lstStyle/>
-          <a:p>
-            <a:pPr algn="ctr"/>
-          </a:p>
-        </p:txBody>
-      </p:sp>
-      <p:sp>
-        <p:nvSpPr>
-          <p:cNvPr id="8" name="Oval 7"/>
-          <p:cNvSpPr/>
-          <p:nvPr/>
-        </p:nvSpPr>
-        <p:spPr>
-          <a:xfrm>
-            <a:off x="5857239" y="3097504"/>
-            <a:ext cx="770947" cy="313893"/>
-          </a:xfrm>
-          <a:prstGeom prst="ellipse">
-            <a:avLst/>
-          </a:prstGeom>
-          <a:noFill/>
-          <a:ln w="57150">
-            <a:solidFill>
-              <a:srgbClr val="E8382F"/>
-            </a:solidFill>
-          </a:ln>
-          <a:effectLst/>
-        </p:spPr>
-        <p:style>
-          <a:lnRef idx="1">
-            <a:schemeClr val="accent1"/>
-          </a:lnRef>
-          <a:fillRef idx="3">
-            <a:schemeClr val="accent1"/>
-          </a:fillRef>
-          <a:effectRef idx="0">
-            <a:schemeClr val="accent1"/>
-          </a:effectRef>
-          <a:fontRef idx="minor">
-            <a:schemeClr val="lt1"/>
-          </a:fontRef>
-        </p:style>
-        <p:txBody>
-          <a:bodyPr rtlCol="0" anchor="ctr"/>
-          <a:lstStyle/>
-          <a:p>
-            <a:pPr algn="ctr"/>
-          </a:p>
-        </p:txBody>
-      </p:sp>
-      <p:sp>
-        <p:nvSpPr>
-          <p:cNvPr id="9" name="Rounded Rectangle 8"/>
-          <p:cNvSpPr/>
-          <p:nvPr/>
-        </p:nvSpPr>
-        <p:spPr>
-          <a:xfrm>
-            <a:off x="5008273" y="3484549"/>
-            <a:ext cx="2468880" cy="420624"/>
-          </a:xfrm>
-          <a:prstGeom prst="roundRect">
-            <a:avLst>
-              <a:gd name="adj" fmla="val 50000"/>
-            </a:avLst>
-          </a:prstGeom>
-          <a:solidFill>
-            <a:srgbClr val="E8382F"/>
-          </a:solidFill>
-          <a:ln>
-            <a:noFill/>
-          </a:ln>
-          <a:effectLst/>
-        </p:spPr>
-        <p:style>
-          <a:lnRef idx="1">
-            <a:schemeClr val="accent1"/>
-          </a:lnRef>
-          <a:fillRef idx="3">
-            <a:schemeClr val="accent1"/>
-          </a:fillRef>
-          <a:effectRef idx="0">
-            <a:schemeClr val="accent1"/>
-          </a:effectRef>
-          <a:fontRef idx="minor">
-            <a:schemeClr val="lt1"/>
-          </a:fontRef>
-        </p:style>
-        <p:txBody>
-          <a:bodyPr rtlCol="0" anchor="ctr"/>
-          <a:lstStyle/>
-          <a:p>
-            <a:pPr algn="ctr"/>
-          </a:p>
-        </p:txBody>
-      </p:sp>
-      <p:sp>
-        <p:nvSpPr>
-          <p:cNvPr id="10" name="TextBox 9"/>
-          <p:cNvSpPr txBox="1"/>
-          <p:nvPr/>
-        </p:nvSpPr>
-        <p:spPr>
-          <a:xfrm>
-            <a:off x="5008273" y="3484549"/>
-            <a:ext cx="2468880" cy="420624"/>
-          </a:xfrm>
-          <a:prstGeom prst="rect">
-            <a:avLst/>
-          </a:prstGeom>
-          <a:noFill/>
-        </p:spPr>
-        <p:txBody>
-          <a:bodyPr wrap="square" lIns="0" rIns="0" tIns="0" bIns="0" anchor="ctr"/>
-          <a:lstStyle/>
-          <a:p>
-            <a:pPr algn="ctr">
-              <a:lnSpc>
-                <a:spcPct val="110000"/>
-              </a:lnSpc>
-            </a:pPr>
-            <a:r>
-              <a:rPr sz="1600" b="1">
-                <a:solidFill>
-                  <a:srgbClr val="FFFFFF"/>
-                </a:solidFill>
-                <a:latin typeface="Inter"/>
-              </a:rPr>
-              <a:t>Click here</a:t>
-            </a:r>
-          </a:p>
-        </p:txBody>
-      </p:sp>
-    </p:spTree>
-  </p:cSld>
-  <p:clrMapOvr>
-    <a:masterClrMapping/>
-  </p:clrMapOvr>
-</p:sld>
-</file>
-
-<file path=ppt/slides/slide9.xml><?xml version="1.0" encoding="utf-8"?>
-<p:sld xmlns:a="http://schemas.openxmlformats.org/drawingml/2006/main" xmlns:p="http://schemas.openxmlformats.org/presentationml/2006/main" xmlns:r="http://schemas.openxmlformats.org/officeDocument/2006/relationships">
-  <p:cSld>
-    <p:bg>
-      <p:bgPr>
-        <a:solidFill>
-          <a:srgbClr val="FFFFFF"/>
-        </a:solidFill>
-        <a:effectLst/>
-      </p:bgPr>
-    </p:bg>
-    <p:spTree>
-      <p:nvGrpSpPr>
-        <p:cNvPr id="1" name=""/>
-        <p:cNvGrpSpPr/>
-        <p:nvPr/>
-      </p:nvGrpSpPr>
-      <p:grpSpPr/>
-      <p:sp>
-        <p:nvSpPr>
-          <p:cNvPr id="2" name="TextBox 1"/>
-          <p:cNvSpPr txBox="1"/>
-          <p:nvPr/>
-        </p:nvSpPr>
-        <p:spPr>
-          <a:xfrm>
-            <a:off x="548640" y="960120"/>
-            <a:ext cx="3474720" cy="1097280"/>
-          </a:xfrm>
-          <a:prstGeom prst="rect">
-            <a:avLst/>
-          </a:prstGeom>
-          <a:noFill/>
-        </p:spPr>
-        <p:txBody>
-          <a:bodyPr wrap="square" lIns="0" rIns="0" tIns="0" bIns="0" anchor="t"/>
-          <a:lstStyle/>
-          <a:p>
-            <a:pPr algn="l">
-              <a:lnSpc>
-                <a:spcPct val="105000"/>
-              </a:lnSpc>
-            </a:pPr>
-            <a:r>
-              <a:rPr sz="3000" b="1">
-                <a:solidFill>
-                  <a:srgbClr val="171717"/>
-                </a:solidFill>
-                <a:latin typeface="Inter"/>
-              </a:rPr>
-              <a:t>Your PDF looks like this.</a:t>
-            </a:r>
-          </a:p>
-        </p:txBody>
-      </p:sp>
-      <p:sp>
-        <p:nvSpPr>
-          <p:cNvPr id="3" name="TextBox 2"/>
-          <p:cNvSpPr txBox="1"/>
-          <p:nvPr/>
-        </p:nvSpPr>
-        <p:spPr>
-          <a:xfrm>
-            <a:off x="548640" y="2331720"/>
-            <a:ext cx="3291840" cy="3200400"/>
-          </a:xfrm>
-          <a:prstGeom prst="rect">
-            <a:avLst/>
-          </a:prstGeom>
-          <a:noFill/>
-        </p:spPr>
-        <p:txBody>
-          <a:bodyPr wrap="square" lIns="0" rIns="0" tIns="0" bIns="0" anchor="t"/>
-          <a:lstStyle/>
-          <a:p>
-            <a:pPr algn="l">
-              <a:lnSpc>
-                <a:spcPct val="120000"/>
-              </a:lnSpc>
-            </a:pPr>
-            <a:r>
-              <a:rPr sz="1800" b="0">
-                <a:solidFill>
-                  <a:srgbClr val="6B6B6B"/>
-                </a:solidFill>
-                <a:latin typeface="Inter"/>
-              </a:rPr>
-              <a:t>One page. Letter size.</a:t>
-            </a:r>
-          </a:p>
-          <a:p>
-            <a:pPr algn="l">
-              <a:lnSpc>
-                <a:spcPct val="120000"/>
-              </a:lnSpc>
-              <a:spcBef>
-                <a:spcPts val="1080"/>
-              </a:spcBef>
-            </a:pPr>
-            <a:r>
-              <a:rPr sz="1800" b="0">
-                <a:solidFill>
-                  <a:srgbClr val="6B6B6B"/>
-                </a:solidFill>
-                <a:latin typeface="Inter"/>
-              </a:rPr>
-              <a:t>The package, the price, and </a:t>
-            </a:r>
-            <a:r>
-              <a:rPr sz="1800" b="1">
-                <a:solidFill>
-                  <a:srgbClr val="6B6B6B"/>
-                </a:solidFill>
-                <a:latin typeface="Inter"/>
-              </a:rPr>
-              <a:t>nothing extra</a:t>
-            </a:r>
-            <a:r>
-              <a:rPr sz="1800" b="0">
-                <a:solidFill>
-                  <a:srgbClr val="6B6B6B"/>
-                </a:solidFill>
-                <a:latin typeface="Inter"/>
-              </a:rPr>
-              <a:t>.</a:t>
-            </a:r>
-          </a:p>
-          <a:p>
-            <a:pPr algn="l">
-              <a:lnSpc>
-                <a:spcPct val="120000"/>
-              </a:lnSpc>
-              <a:spcBef>
-                <a:spcPts val="1080"/>
-              </a:spcBef>
-            </a:pPr>
-            <a:r>
-              <a:rPr sz="1800" b="0">
-                <a:solidFill>
-                  <a:srgbClr val="6B6B6B"/>
-                </a:solidFill>
-                <a:latin typeface="Inter"/>
-              </a:rPr>
-              <a:t>Ready to print or email.</a:t>
-            </a:r>
-          </a:p>
-        </p:txBody>
-      </p:sp>
-      <p:pic>
-        <p:nvPicPr>
-          <p:cNvPr id="4" name="Picture 3" descr="onepager.png"/>
-          <p:cNvPicPr>
-            <a:picLocks noChangeAspect="1"/>
-          </p:cNvPicPr>
-          <p:nvPr/>
-        </p:nvPicPr>
-        <p:blipFill>
-          <a:blip r:embed="rId2"/>
-          <a:stretch>
-            <a:fillRect/>
-          </a:stretch>
-        </p:blipFill>
-        <p:spPr>
-          <a:xfrm>
-            <a:off x="5852160" y="502920"/>
-            <a:ext cx="4522124" cy="5852160"/>
-          </a:xfrm>
-          <a:prstGeom prst="rect">
-            <a:avLst/>
-          </a:prstGeom>
-        </p:spPr>
-      </p:pic>
-      <p:sp>
-        <p:nvSpPr>
-          <p:cNvPr id="5" name="Rounded Rectangle 4"/>
-          <p:cNvSpPr/>
-          <p:nvPr/>
-        </p:nvSpPr>
-        <p:spPr>
-          <a:xfrm>
-            <a:off x="5852160" y="502920"/>
-            <a:ext cx="4522123" cy="5852160"/>
-          </a:xfrm>
-          <a:prstGeom prst="roundRect">
-            <a:avLst>
-              <a:gd name="adj" fmla="val 808"/>
-            </a:avLst>
-          </a:prstGeom>
-          <a:noFill/>
-          <a:ln w="9525">
-            <a:solidFill>
-              <a:srgbClr val="DADCE0"/>
-            </a:solidFill>
-          </a:ln>
-          <a:effectLst/>
-        </p:spPr>
-        <p:style>
-          <a:lnRef idx="1">
-            <a:schemeClr val="accent1"/>
-          </a:lnRef>
-          <a:fillRef idx="3">
-            <a:schemeClr val="accent1"/>
-          </a:fillRef>
-          <a:effectRef idx="0">
-            <a:schemeClr val="accent1"/>
-          </a:effectRef>
-          <a:fontRef idx="minor">
-            <a:schemeClr val="lt1"/>
-          </a:fontRef>
-        </p:style>
-        <p:txBody>
-          <a:bodyPr rtlCol="0" anchor="ctr"/>
-          <a:lstStyle/>
-          <a:p>
-            <a:pPr algn="ctr"/>
+              <a:t>Everything else fills itself in.</a:t>
+            </a:r>
           </a:p>
         </p:txBody>
       </p:sp>
